--- a/output_pptx/Way_Maker.pptx
+++ b/output_pptx/Way_Maker.pptx
@@ -17,6 +17,8 @@
     <p:sldId id="265" r:id="rId16"/>
     <p:sldId id="266" r:id="rId17"/>
     <p:sldId id="267" r:id="rId18"/>
+    <p:sldId id="268" r:id="rId19"/>
+    <p:sldId id="269" r:id="rId20"/>
   </p:sldIdLst>
   <p:sldSz cx="12191695" cy="6858000" type="screen4x3"/>
   <p:notesSz cx="6858000" cy="9144000"/>
@@ -3115,23 +3117,23 @@
         </p:nvSpPr>
         <p:spPr>
           <a:xfrm>
-            <a:off x="594360" y="1837944"/>
-            <a:ext cx="11002975" cy="685800"/>
-          </a:xfrm>
-          <a:prstGeom prst="rect">
-            <a:avLst/>
-          </a:prstGeom>
-          <a:noFill/>
-        </p:spPr>
-        <p:txBody>
-          <a:bodyPr wrap="square">
-            <a:spAutoFit/>
-          </a:bodyPr>
-          <a:lstStyle/>
-          <a:p>
-            <a:pPr algn="ctr"/>
-            <a:r>
-              <a:rPr sz="3911" b="1" i="0">
+            <a:off x="640080" y="1650492"/>
+            <a:ext cx="10911535" cy="731520"/>
+          </a:xfrm>
+          <a:prstGeom prst="rect">
+            <a:avLst/>
+          </a:prstGeom>
+          <a:noFill/>
+        </p:spPr>
+        <p:txBody>
+          <a:bodyPr wrap="square">
+            <a:spAutoFit/>
+          </a:bodyPr>
+          <a:lstStyle/>
+          <a:p>
+            <a:pPr algn="ctr"/>
+            <a:r>
+              <a:rPr sz="4200" b="1" i="0">
                 <a:solidFill>
                   <a:srgbClr val="FFFFFF"/>
                 </a:solidFill>
@@ -3150,8 +3152,8 @@
         </p:nvSpPr>
         <p:spPr>
           <a:xfrm>
-            <a:off x="594360" y="2560320"/>
-            <a:ext cx="11002975" cy="384048"/>
+            <a:off x="640080" y="2418588"/>
+            <a:ext cx="10911535" cy="365760"/>
           </a:xfrm>
           <a:prstGeom prst="rect">
             <a:avLst/>
@@ -3168,7 +3170,7 @@
             <a:r>
               <a:rPr sz="2400" b="0" i="1">
                 <a:solidFill>
-                  <a:srgbClr val="B4B4B4"/>
+                  <a:srgbClr val="AAAAAA"/>
                 </a:solidFill>
                 <a:latin typeface="Arial"/>
               </a:rPr>
@@ -3185,8 +3187,78 @@
         </p:nvSpPr>
         <p:spPr>
           <a:xfrm>
-            <a:off x="594360" y="2980944"/>
-            <a:ext cx="11002975" cy="347472"/>
+            <a:off x="640080" y="2985516"/>
+            <a:ext cx="10911535" cy="731520"/>
+          </a:xfrm>
+          <a:prstGeom prst="rect">
+            <a:avLst/>
+          </a:prstGeom>
+          <a:noFill/>
+        </p:spPr>
+        <p:txBody>
+          <a:bodyPr wrap="square">
+            <a:spAutoFit/>
+          </a:bodyPr>
+          <a:lstStyle/>
+          <a:p>
+            <a:pPr algn="ctr"/>
+            <a:r>
+              <a:rPr sz="4200" b="1" i="0">
+                <a:solidFill>
+                  <a:srgbClr val="FFFFFF"/>
+                </a:solidFill>
+                <a:latin typeface="Arial"/>
+              </a:rPr>
+              <a:t>みちびいてくれている  --&gt;  あなたがをあがめよう</a:t>
+            </a:r>
+          </a:p>
+        </p:txBody>
+      </p:sp>
+      <p:sp>
+        <p:nvSpPr>
+          <p:cNvPr id="5" name="TextBox 4"/>
+          <p:cNvSpPr txBox="1"/>
+          <p:nvPr/>
+        </p:nvSpPr>
+        <p:spPr>
+          <a:xfrm>
+            <a:off x="640080" y="3753612"/>
+            <a:ext cx="10911535" cy="365760"/>
+          </a:xfrm>
+          <a:prstGeom prst="rect">
+            <a:avLst/>
+          </a:prstGeom>
+          <a:noFill/>
+        </p:spPr>
+        <p:txBody>
+          <a:bodyPr wrap="square">
+            <a:spAutoFit/>
+          </a:bodyPr>
+          <a:lstStyle/>
+          <a:p>
+            <a:pPr algn="ctr"/>
+            <a:r>
+              <a:rPr sz="2400" b="0" i="1">
+                <a:solidFill>
+                  <a:srgbClr val="AAAAAA"/>
+                </a:solidFill>
+                <a:latin typeface="Arial"/>
+              </a:rPr>
+              <a:t>Michibiite kureteiru    Anatawo Agameyou</a:t>
+            </a:r>
+          </a:p>
+        </p:txBody>
+      </p:sp>
+      <p:sp>
+        <p:nvSpPr>
+          <p:cNvPr id="6" name="TextBox 5"/>
+          <p:cNvSpPr txBox="1"/>
+          <p:nvPr/>
+        </p:nvSpPr>
+        <p:spPr>
+          <a:xfrm>
+            <a:off x="640080" y="4530852"/>
+            <a:ext cx="10911535" cy="310896"/>
           </a:xfrm>
           <a:prstGeom prst="rect">
             <a:avLst/>
@@ -3203,81 +3275,11 @@
             <a:r>
               <a:rPr sz="2000" b="0" i="1">
                 <a:solidFill>
-                  <a:srgbClr val="8C8C8C"/>
-                </a:solidFill>
-                <a:latin typeface="Arial"/>
-              </a:rPr>
-              <a:t/>
-            </a:r>
-          </a:p>
-        </p:txBody>
-      </p:sp>
-      <p:sp>
-        <p:nvSpPr>
-          <p:cNvPr id="5" name="TextBox 4"/>
-          <p:cNvSpPr txBox="1"/>
-          <p:nvPr/>
-        </p:nvSpPr>
-        <p:spPr>
-          <a:xfrm>
-            <a:off x="594360" y="3529584"/>
-            <a:ext cx="11002975" cy="685800"/>
-          </a:xfrm>
-          <a:prstGeom prst="rect">
-            <a:avLst/>
-          </a:prstGeom>
-          <a:noFill/>
-        </p:spPr>
-        <p:txBody>
-          <a:bodyPr wrap="square">
-            <a:spAutoFit/>
-          </a:bodyPr>
-          <a:lstStyle/>
-          <a:p>
-            <a:pPr algn="ctr"/>
-            <a:r>
-              <a:rPr sz="3911" b="1" i="0">
-                <a:solidFill>
-                  <a:srgbClr val="FFFFFF"/>
-                </a:solidFill>
-                <a:latin typeface="Arial"/>
-              </a:rPr>
-              <a:t>みちびいてくれている  --&gt;  あなたがをあがめよう</a:t>
-            </a:r>
-          </a:p>
-        </p:txBody>
-      </p:sp>
-      <p:sp>
-        <p:nvSpPr>
-          <p:cNvPr id="6" name="TextBox 5"/>
-          <p:cNvSpPr txBox="1"/>
-          <p:nvPr/>
-        </p:nvSpPr>
-        <p:spPr>
-          <a:xfrm>
-            <a:off x="594360" y="4251960"/>
-            <a:ext cx="11002975" cy="384048"/>
-          </a:xfrm>
-          <a:prstGeom prst="rect">
-            <a:avLst/>
-          </a:prstGeom>
-          <a:noFill/>
-        </p:spPr>
-        <p:txBody>
-          <a:bodyPr wrap="square">
-            <a:spAutoFit/>
-          </a:bodyPr>
-          <a:lstStyle/>
-          <a:p>
-            <a:pPr algn="ctr"/>
-            <a:r>
-              <a:rPr sz="2400" b="0" i="1">
-                <a:solidFill>
-                  <a:srgbClr val="B4B4B4"/>
-                </a:solidFill>
-                <a:latin typeface="Arial"/>
-              </a:rPr>
-              <a:t>Michibiite kureteiru    Anatawo Agameyou</a:t>
+                  <a:srgbClr val="828282"/>
+                </a:solidFill>
+                <a:latin typeface="Arial"/>
+              </a:rPr>
+              <a:t>Criador de Caminhos</a:t>
             </a:r>
           </a:p>
         </p:txBody>
@@ -3290,8 +3292,8 @@
         </p:nvSpPr>
         <p:spPr>
           <a:xfrm>
-            <a:off x="594360" y="4672584"/>
-            <a:ext cx="11002975" cy="347472"/>
+            <a:off x="640080" y="4896612"/>
+            <a:ext cx="10911535" cy="310896"/>
           </a:xfrm>
           <a:prstGeom prst="rect">
             <a:avLst/>
@@ -3308,11 +3310,11 @@
             <a:r>
               <a:rPr sz="2000" b="0" i="1">
                 <a:solidFill>
-                  <a:srgbClr val="8C8C8C"/>
-                </a:solidFill>
-                <a:latin typeface="Arial"/>
-              </a:rPr>
-              <a:t/>
+                  <a:srgbClr val="828282"/>
+                </a:solidFill>
+                <a:latin typeface="Arial"/>
+              </a:rPr>
+              <a:t>Tu estás aqui</a:t>
             </a:r>
           </a:p>
         </p:txBody>
@@ -3351,29 +3353,29 @@
         </p:nvSpPr>
         <p:spPr>
           <a:xfrm>
-            <a:off x="594360" y="1837944"/>
-            <a:ext cx="11002975" cy="685800"/>
-          </a:xfrm>
-          <a:prstGeom prst="rect">
-            <a:avLst/>
-          </a:prstGeom>
-          <a:noFill/>
-        </p:spPr>
-        <p:txBody>
-          <a:bodyPr wrap="square">
-            <a:spAutoFit/>
-          </a:bodyPr>
-          <a:lstStyle/>
-          <a:p>
-            <a:pPr algn="ctr"/>
-            <a:r>
-              <a:rPr sz="4400" b="1" i="0">
+            <a:off x="640080" y="1650492"/>
+            <a:ext cx="10911535" cy="731520"/>
+          </a:xfrm>
+          <a:prstGeom prst="rect">
+            <a:avLst/>
+          </a:prstGeom>
+          <a:noFill/>
+        </p:spPr>
+        <p:txBody>
+          <a:bodyPr wrap="square">
+            <a:spAutoFit/>
+          </a:bodyPr>
+          <a:lstStyle/>
+          <a:p>
+            <a:pPr algn="ctr"/>
+            <a:r>
+              <a:rPr sz="4800" b="1" i="0">
                 <a:solidFill>
                   <a:srgbClr val="FFFFFF"/>
                 </a:solidFill>
                 <a:latin typeface="Arial"/>
               </a:rPr>
-              <a:t>奇跡をおこして　約束を果たして 道ひらく神</a:t>
+              <a:t>ここにあなたがいる</a:t>
             </a:r>
           </a:p>
         </p:txBody>
@@ -3386,29 +3388,29 @@
         </p:nvSpPr>
         <p:spPr>
           <a:xfrm>
-            <a:off x="594360" y="2560320"/>
-            <a:ext cx="11002975" cy="384048"/>
-          </a:xfrm>
-          <a:prstGeom prst="rect">
-            <a:avLst/>
-          </a:prstGeom>
-          <a:noFill/>
-        </p:spPr>
-        <p:txBody>
-          <a:bodyPr wrap="square">
-            <a:spAutoFit/>
-          </a:bodyPr>
-          <a:lstStyle/>
-          <a:p>
-            <a:pPr algn="ctr"/>
-            <a:r>
-              <a:rPr sz="1737" b="0" i="1">
-                <a:solidFill>
-                  <a:srgbClr val="B4B4B4"/>
-                </a:solidFill>
-                <a:latin typeface="Arial"/>
-              </a:rPr>
-              <a:t>Kisekiwo Okoshite, Yakusokuwo Hatashite, Michi Hiraku Kami</a:t>
+            <a:off x="640080" y="2418588"/>
+            <a:ext cx="10911535" cy="365760"/>
+          </a:xfrm>
+          <a:prstGeom prst="rect">
+            <a:avLst/>
+          </a:prstGeom>
+          <a:noFill/>
+        </p:spPr>
+        <p:txBody>
+          <a:bodyPr wrap="square">
+            <a:spAutoFit/>
+          </a:bodyPr>
+          <a:lstStyle/>
+          <a:p>
+            <a:pPr algn="ctr"/>
+            <a:r>
+              <a:rPr sz="2400" b="0" i="1">
+                <a:solidFill>
+                  <a:srgbClr val="AAAAAA"/>
+                </a:solidFill>
+                <a:latin typeface="Arial"/>
+              </a:rPr>
+              <a:t>Kokoni Anataga iru</a:t>
             </a:r>
           </a:p>
         </p:txBody>
@@ -3421,8 +3423,78 @@
         </p:nvSpPr>
         <p:spPr>
           <a:xfrm>
-            <a:off x="594360" y="2980944"/>
-            <a:ext cx="11002975" cy="347472"/>
+            <a:off x="640080" y="2985516"/>
+            <a:ext cx="10911535" cy="731520"/>
+          </a:xfrm>
+          <a:prstGeom prst="rect">
+            <a:avLst/>
+          </a:prstGeom>
+          <a:noFill/>
+        </p:spPr>
+        <p:txBody>
+          <a:bodyPr wrap="square">
+            <a:spAutoFit/>
+          </a:bodyPr>
+          <a:lstStyle/>
+          <a:p>
+            <a:pPr algn="ctr"/>
+            <a:r>
+              <a:rPr sz="4800" b="1" i="0">
+                <a:solidFill>
+                  <a:srgbClr val="FFFFFF"/>
+                </a:solidFill>
+                <a:latin typeface="Arial"/>
+              </a:rPr>
+              <a:t>ここで働いている (x2)</a:t>
+            </a:r>
+          </a:p>
+        </p:txBody>
+      </p:sp>
+      <p:sp>
+        <p:nvSpPr>
+          <p:cNvPr id="5" name="TextBox 4"/>
+          <p:cNvSpPr txBox="1"/>
+          <p:nvPr/>
+        </p:nvSpPr>
+        <p:spPr>
+          <a:xfrm>
+            <a:off x="640080" y="3753612"/>
+            <a:ext cx="10911535" cy="365760"/>
+          </a:xfrm>
+          <a:prstGeom prst="rect">
+            <a:avLst/>
+          </a:prstGeom>
+          <a:noFill/>
+        </p:spPr>
+        <p:txBody>
+          <a:bodyPr wrap="square">
+            <a:spAutoFit/>
+          </a:bodyPr>
+          <a:lstStyle/>
+          <a:p>
+            <a:pPr algn="ctr"/>
+            <a:r>
+              <a:rPr sz="2400" b="0" i="1">
+                <a:solidFill>
+                  <a:srgbClr val="AAAAAA"/>
+                </a:solidFill>
+                <a:latin typeface="Arial"/>
+              </a:rPr>
+              <a:t>Kokode Hataraiteiru</a:t>
+            </a:r>
+          </a:p>
+        </p:txBody>
+      </p:sp>
+      <p:sp>
+        <p:nvSpPr>
+          <p:cNvPr id="6" name="TextBox 5"/>
+          <p:cNvSpPr txBox="1"/>
+          <p:nvPr/>
+        </p:nvSpPr>
+        <p:spPr>
+          <a:xfrm>
+            <a:off x="640080" y="4530852"/>
+            <a:ext cx="10911535" cy="310896"/>
           </a:xfrm>
           <a:prstGeom prst="rect">
             <a:avLst/>
@@ -3439,81 +3511,11 @@
             <a:r>
               <a:rPr sz="2000" b="0" i="1">
                 <a:solidFill>
-                  <a:srgbClr val="8C8C8C"/>
-                </a:solidFill>
-                <a:latin typeface="Arial"/>
-              </a:rPr>
-              <a:t/>
-            </a:r>
-          </a:p>
-        </p:txBody>
-      </p:sp>
-      <p:sp>
-        <p:nvSpPr>
-          <p:cNvPr id="5" name="TextBox 4"/>
-          <p:cNvSpPr txBox="1"/>
-          <p:nvPr/>
-        </p:nvSpPr>
-        <p:spPr>
-          <a:xfrm>
-            <a:off x="594360" y="3529584"/>
-            <a:ext cx="11002975" cy="685800"/>
-          </a:xfrm>
-          <a:prstGeom prst="rect">
-            <a:avLst/>
-          </a:prstGeom>
-          <a:noFill/>
-        </p:spPr>
-        <p:txBody>
-          <a:bodyPr wrap="square">
-            <a:spAutoFit/>
-          </a:bodyPr>
-          <a:lstStyle/>
-          <a:p>
-            <a:pPr algn="ctr"/>
-            <a:r>
-              <a:rPr sz="4400" b="1" i="0">
-                <a:solidFill>
-                  <a:srgbClr val="FFFFFF"/>
-                </a:solidFill>
-                <a:latin typeface="Arial"/>
-              </a:rPr>
-              <a:t>暗やみを照らし　光でみちびき 道ひらく神</a:t>
-            </a:r>
-          </a:p>
-        </p:txBody>
-      </p:sp>
-      <p:sp>
-        <p:nvSpPr>
-          <p:cNvPr id="6" name="TextBox 5"/>
-          <p:cNvSpPr txBox="1"/>
-          <p:nvPr/>
-        </p:nvSpPr>
-        <p:spPr>
-          <a:xfrm>
-            <a:off x="594360" y="4251960"/>
-            <a:ext cx="11002975" cy="384048"/>
-          </a:xfrm>
-          <a:prstGeom prst="rect">
-            <a:avLst/>
-          </a:prstGeom>
-          <a:noFill/>
-        </p:spPr>
-        <p:txBody>
-          <a:bodyPr wrap="square">
-            <a:spAutoFit/>
-          </a:bodyPr>
-          <a:lstStyle/>
-          <a:p>
-            <a:pPr algn="ctr"/>
-            <a:r>
-              <a:rPr sz="1768" b="0" i="1">
-                <a:solidFill>
-                  <a:srgbClr val="B4B4B4"/>
-                </a:solidFill>
-                <a:latin typeface="Arial"/>
-              </a:rPr>
-              <a:t>Kurayamiwo Terashi, Hikaride Michibiki, Michi Hiraku Kami</a:t>
+                  <a:srgbClr val="828282"/>
+                </a:solidFill>
+                <a:latin typeface="Arial"/>
+              </a:rPr>
+              <a:t>Caminho no Deserto</a:t>
             </a:r>
           </a:p>
         </p:txBody>
@@ -3526,8 +3528,8 @@
         </p:nvSpPr>
         <p:spPr>
           <a:xfrm>
-            <a:off x="594360" y="4672584"/>
-            <a:ext cx="11002975" cy="347472"/>
+            <a:off x="640080" y="4896612"/>
+            <a:ext cx="10911535" cy="310896"/>
           </a:xfrm>
           <a:prstGeom prst="rect">
             <a:avLst/>
@@ -3544,11 +3546,11 @@
             <a:r>
               <a:rPr sz="2000" b="0" i="1">
                 <a:solidFill>
-                  <a:srgbClr val="8C8C8C"/>
-                </a:solidFill>
-                <a:latin typeface="Arial"/>
-              </a:rPr>
-              <a:t/>
+                  <a:srgbClr val="828282"/>
+                </a:solidFill>
+                <a:latin typeface="Arial"/>
+              </a:rPr>
+              <a:t>Deus de Milagres</a:t>
             </a:r>
           </a:p>
         </p:txBody>
@@ -3587,29 +3589,29 @@
         </p:nvSpPr>
         <p:spPr>
           <a:xfrm>
-            <a:off x="594360" y="2258568"/>
-            <a:ext cx="11002975" cy="685800"/>
-          </a:xfrm>
-          <a:prstGeom prst="rect">
-            <a:avLst/>
-          </a:prstGeom>
-          <a:noFill/>
-        </p:spPr>
-        <p:txBody>
-          <a:bodyPr wrap="square">
-            <a:spAutoFit/>
-          </a:bodyPr>
-          <a:lstStyle/>
-          <a:p>
-            <a:pPr algn="ctr"/>
-            <a:r>
-              <a:rPr sz="4400" b="1" i="0">
+            <a:off x="640080" y="1650492"/>
+            <a:ext cx="10911535" cy="731520"/>
+          </a:xfrm>
+          <a:prstGeom prst="rect">
+            <a:avLst/>
+          </a:prstGeom>
+          <a:noFill/>
+        </p:spPr>
+        <p:txBody>
+          <a:bodyPr wrap="square">
+            <a:spAutoFit/>
+          </a:bodyPr>
+          <a:lstStyle/>
+          <a:p>
+            <a:pPr algn="ctr"/>
+            <a:r>
+              <a:rPr sz="4800" b="1" i="0">
                 <a:solidFill>
                   <a:srgbClr val="FFFFFF"/>
                 </a:solidFill>
                 <a:latin typeface="Arial"/>
               </a:rPr>
-              <a:t>Deus de Promessas</a:t>
+              <a:t>奇跡をおこして　約束を果たして 道ひらく神</a:t>
             </a:r>
           </a:p>
         </p:txBody>
@@ -3622,29 +3624,29 @@
         </p:nvSpPr>
         <p:spPr>
           <a:xfrm>
-            <a:off x="594360" y="2980944"/>
-            <a:ext cx="11002975" cy="347472"/>
-          </a:xfrm>
-          <a:prstGeom prst="rect">
-            <a:avLst/>
-          </a:prstGeom>
-          <a:noFill/>
-        </p:spPr>
-        <p:txBody>
-          <a:bodyPr wrap="square">
-            <a:spAutoFit/>
-          </a:bodyPr>
-          <a:lstStyle/>
-          <a:p>
-            <a:pPr algn="ctr"/>
-            <a:r>
-              <a:rPr sz="2200" b="0" i="1">
-                <a:solidFill>
-                  <a:srgbClr val="8C8C8C"/>
-                </a:solidFill>
-                <a:latin typeface="Arial"/>
-              </a:rPr>
-              <a:t/>
+            <a:off x="640080" y="2418588"/>
+            <a:ext cx="10911535" cy="365760"/>
+          </a:xfrm>
+          <a:prstGeom prst="rect">
+            <a:avLst/>
+          </a:prstGeom>
+          <a:noFill/>
+        </p:spPr>
+        <p:txBody>
+          <a:bodyPr wrap="square">
+            <a:spAutoFit/>
+          </a:bodyPr>
+          <a:lstStyle/>
+          <a:p>
+            <a:pPr algn="ctr"/>
+            <a:r>
+              <a:rPr sz="2100" b="0" i="1">
+                <a:solidFill>
+                  <a:srgbClr val="AAAAAA"/>
+                </a:solidFill>
+                <a:latin typeface="Arial"/>
+              </a:rPr>
+              <a:t>Kisekiwo Okoshite, Yakusokuwo Hatashite, Michi Hiraku Kami</a:t>
             </a:r>
           </a:p>
         </p:txBody>
@@ -3657,29 +3659,29 @@
         </p:nvSpPr>
         <p:spPr>
           <a:xfrm>
-            <a:off x="594360" y="3529584"/>
-            <a:ext cx="11002975" cy="685800"/>
-          </a:xfrm>
-          <a:prstGeom prst="rect">
-            <a:avLst/>
-          </a:prstGeom>
-          <a:noFill/>
-        </p:spPr>
-        <p:txBody>
-          <a:bodyPr wrap="square">
-            <a:spAutoFit/>
-          </a:bodyPr>
-          <a:lstStyle/>
-          <a:p>
-            <a:pPr algn="ctr"/>
-            <a:r>
-              <a:rPr sz="4400" b="1" i="0">
+            <a:off x="640080" y="2985516"/>
+            <a:ext cx="10911535" cy="731520"/>
+          </a:xfrm>
+          <a:prstGeom prst="rect">
+            <a:avLst/>
+          </a:prstGeom>
+          <a:noFill/>
+        </p:spPr>
+        <p:txBody>
+          <a:bodyPr wrap="square">
+            <a:spAutoFit/>
+          </a:bodyPr>
+          <a:lstStyle/>
+          <a:p>
+            <a:pPr algn="ctr"/>
+            <a:r>
+              <a:rPr sz="4800" b="1" i="0">
                 <a:solidFill>
                   <a:srgbClr val="FFFFFF"/>
                 </a:solidFill>
                 <a:latin typeface="Arial"/>
               </a:rPr>
-              <a:t>Luz na escuridão</a:t>
+              <a:t>暗やみを照らし　光でみちびき 道ひらく神</a:t>
             </a:r>
           </a:p>
         </p:txBody>
@@ -3692,29 +3694,99 @@
         </p:nvSpPr>
         <p:spPr>
           <a:xfrm>
-            <a:off x="594360" y="4251960"/>
-            <a:ext cx="11002975" cy="347472"/>
-          </a:xfrm>
-          <a:prstGeom prst="rect">
-            <a:avLst/>
-          </a:prstGeom>
-          <a:noFill/>
-        </p:spPr>
-        <p:txBody>
-          <a:bodyPr wrap="square">
-            <a:spAutoFit/>
-          </a:bodyPr>
-          <a:lstStyle/>
-          <a:p>
-            <a:pPr algn="ctr"/>
-            <a:r>
-              <a:rPr sz="2200" b="0" i="1">
-                <a:solidFill>
-                  <a:srgbClr val="8C8C8C"/>
-                </a:solidFill>
-                <a:latin typeface="Arial"/>
-              </a:rPr>
-              <a:t/>
+            <a:off x="640080" y="3753612"/>
+            <a:ext cx="10911535" cy="365760"/>
+          </a:xfrm>
+          <a:prstGeom prst="rect">
+            <a:avLst/>
+          </a:prstGeom>
+          <a:noFill/>
+        </p:spPr>
+        <p:txBody>
+          <a:bodyPr wrap="square">
+            <a:spAutoFit/>
+          </a:bodyPr>
+          <a:lstStyle/>
+          <a:p>
+            <a:pPr algn="ctr"/>
+            <a:r>
+              <a:rPr sz="2100" b="0" i="1">
+                <a:solidFill>
+                  <a:srgbClr val="AAAAAA"/>
+                </a:solidFill>
+                <a:latin typeface="Arial"/>
+              </a:rPr>
+              <a:t>Kurayamiwo Terashi, Hikaride Michibiki, Michi Hiraku Kami</a:t>
+            </a:r>
+          </a:p>
+        </p:txBody>
+      </p:sp>
+      <p:sp>
+        <p:nvSpPr>
+          <p:cNvPr id="6" name="TextBox 5"/>
+          <p:cNvSpPr txBox="1"/>
+          <p:nvPr/>
+        </p:nvSpPr>
+        <p:spPr>
+          <a:xfrm>
+            <a:off x="640080" y="4530852"/>
+            <a:ext cx="10911535" cy="310896"/>
+          </a:xfrm>
+          <a:prstGeom prst="rect">
+            <a:avLst/>
+          </a:prstGeom>
+          <a:noFill/>
+        </p:spPr>
+        <p:txBody>
+          <a:bodyPr wrap="square">
+            <a:spAutoFit/>
+          </a:bodyPr>
+          <a:lstStyle/>
+          <a:p>
+            <a:pPr algn="ctr"/>
+            <a:r>
+              <a:rPr sz="2000" b="0" i="1">
+                <a:solidFill>
+                  <a:srgbClr val="828282"/>
+                </a:solidFill>
+                <a:latin typeface="Arial"/>
+              </a:rPr>
+              <a:t>Movendo-se entre nós</a:t>
+            </a:r>
+          </a:p>
+        </p:txBody>
+      </p:sp>
+      <p:sp>
+        <p:nvSpPr>
+          <p:cNvPr id="7" name="TextBox 6"/>
+          <p:cNvSpPr txBox="1"/>
+          <p:nvPr/>
+        </p:nvSpPr>
+        <p:spPr>
+          <a:xfrm>
+            <a:off x="640080" y="4896612"/>
+            <a:ext cx="10911535" cy="310896"/>
+          </a:xfrm>
+          <a:prstGeom prst="rect">
+            <a:avLst/>
+          </a:prstGeom>
+          <a:noFill/>
+        </p:spPr>
+        <p:txBody>
+          <a:bodyPr wrap="square">
+            <a:spAutoFit/>
+          </a:bodyPr>
+          <a:lstStyle/>
+          <a:p>
+            <a:pPr algn="ctr"/>
+            <a:r>
+              <a:rPr sz="2000" b="0" i="1">
+                <a:solidFill>
+                  <a:srgbClr val="828282"/>
+                </a:solidFill>
+                <a:latin typeface="Arial"/>
+              </a:rPr>
+              <a:t>Eu Te adoro</a:t>
             </a:r>
           </a:p>
         </p:txBody>
@@ -3753,64 +3825,396 @@
         </p:nvSpPr>
         <p:spPr>
           <a:xfrm>
-            <a:off x="594360" y="2894076"/>
-            <a:ext cx="11002975" cy="685800"/>
-          </a:xfrm>
-          <a:prstGeom prst="rect">
-            <a:avLst/>
-          </a:prstGeom>
-          <a:noFill/>
-        </p:spPr>
-        <p:txBody>
-          <a:bodyPr wrap="square">
-            <a:spAutoFit/>
-          </a:bodyPr>
-          <a:lstStyle/>
-          <a:p>
-            <a:pPr algn="ctr"/>
-            <a:r>
-              <a:rPr sz="4400" b="1" i="0">
+            <a:off x="640080" y="2052828"/>
+            <a:ext cx="10911535" cy="731520"/>
+          </a:xfrm>
+          <a:prstGeom prst="rect">
+            <a:avLst/>
+          </a:prstGeom>
+          <a:noFill/>
+        </p:spPr>
+        <p:txBody>
+          <a:bodyPr wrap="square">
+            <a:spAutoFit/>
+          </a:bodyPr>
+          <a:lstStyle/>
+          <a:p>
+            <a:pPr algn="ctr"/>
+            <a:r>
+              <a:rPr sz="4800" b="1" i="0">
                 <a:solidFill>
                   <a:srgbClr val="FFFFFF"/>
                 </a:solidFill>
                 <a:latin typeface="Arial"/>
               </a:rPr>
+              <a:t>Movendo-se entre nós</a:t>
+            </a:r>
+          </a:p>
+        </p:txBody>
+      </p:sp>
+      <p:sp>
+        <p:nvSpPr>
+          <p:cNvPr id="3" name="TextBox 2"/>
+          <p:cNvSpPr txBox="1"/>
+          <p:nvPr/>
+        </p:nvSpPr>
+        <p:spPr>
+          <a:xfrm>
+            <a:off x="640080" y="2985516"/>
+            <a:ext cx="10911535" cy="731520"/>
+          </a:xfrm>
+          <a:prstGeom prst="rect">
+            <a:avLst/>
+          </a:prstGeom>
+          <a:noFill/>
+        </p:spPr>
+        <p:txBody>
+          <a:bodyPr wrap="square">
+            <a:spAutoFit/>
+          </a:bodyPr>
+          <a:lstStyle/>
+          <a:p>
+            <a:pPr algn="ctr"/>
+            <a:r>
+              <a:rPr sz="4800" b="1" i="0">
+                <a:solidFill>
+                  <a:srgbClr val="FFFFFF"/>
+                </a:solidFill>
+                <a:latin typeface="Arial"/>
+              </a:rPr>
+              <a:t>Eu Te adoro</a:t>
+            </a:r>
+          </a:p>
+        </p:txBody>
+      </p:sp>
+      <p:sp>
+        <p:nvSpPr>
+          <p:cNvPr id="4" name="TextBox 3"/>
+          <p:cNvSpPr txBox="1"/>
+          <p:nvPr/>
+        </p:nvSpPr>
+        <p:spPr>
+          <a:xfrm>
+            <a:off x="640080" y="4128516"/>
+            <a:ext cx="10911535" cy="310896"/>
+          </a:xfrm>
+          <a:prstGeom prst="rect">
+            <a:avLst/>
+          </a:prstGeom>
+          <a:noFill/>
+        </p:spPr>
+        <p:txBody>
+          <a:bodyPr wrap="square">
+            <a:spAutoFit/>
+          </a:bodyPr>
+          <a:lstStyle/>
+          <a:p>
+            <a:pPr algn="ctr"/>
+            <a:r>
+              <a:rPr sz="2000" b="0" i="0">
+                <a:solidFill>
+                  <a:srgbClr val="828282"/>
+                </a:solidFill>
+                <a:latin typeface="Arial"/>
+              </a:rPr>
+              <a:t>（主は）奇跡をおこして　約束を果たして 道ひらく神</a:t>
+            </a:r>
+          </a:p>
+        </p:txBody>
+      </p:sp>
+      <p:sp>
+        <p:nvSpPr>
+          <p:cNvPr id="5" name="TextBox 4"/>
+          <p:cNvSpPr txBox="1"/>
+          <p:nvPr/>
+        </p:nvSpPr>
+        <p:spPr>
+          <a:xfrm>
+            <a:off x="640080" y="4494276"/>
+            <a:ext cx="10911535" cy="310896"/>
+          </a:xfrm>
+          <a:prstGeom prst="rect">
+            <a:avLst/>
+          </a:prstGeom>
+          <a:noFill/>
+        </p:spPr>
+        <p:txBody>
+          <a:bodyPr wrap="square">
+            <a:spAutoFit/>
+          </a:bodyPr>
+          <a:lstStyle/>
+          <a:p>
+            <a:pPr algn="ctr"/>
+            <a:r>
+              <a:rPr sz="2000" b="0" i="0">
+                <a:solidFill>
+                  <a:srgbClr val="828282"/>
+                </a:solidFill>
+                <a:latin typeface="Arial"/>
+              </a:rPr>
+              <a:t>暗やみを照らし　光でみちびき 道ひらく神 (x2)</a:t>
+            </a:r>
+          </a:p>
+        </p:txBody>
+      </p:sp>
+    </p:spTree>
+  </p:cSld>
+  <p:clrMapOvr>
+    <a:masterClrMapping/>
+  </p:clrMapOvr>
+</p:sld>
+</file>
+
+<file path=ppt/slides/slide13.xml><?xml version="1.0" encoding="utf-8"?>
+<p:sld xmlns:a="http://schemas.openxmlformats.org/drawingml/2006/main" xmlns:p="http://schemas.openxmlformats.org/presentationml/2006/main" xmlns:r="http://schemas.openxmlformats.org/officeDocument/2006/relationships">
+  <p:cSld>
+    <p:bg>
+      <p:bgPr>
+        <a:solidFill>
+          <a:srgbClr val="000000"/>
+        </a:solidFill>
+        <a:effectLst/>
+      </p:bgPr>
+    </p:bg>
+    <p:spTree>
+      <p:nvGrpSpPr>
+        <p:cNvPr id="1" name=""/>
+        <p:cNvGrpSpPr/>
+        <p:nvPr/>
+      </p:nvGrpSpPr>
+      <p:grpSpPr/>
+      <p:sp>
+        <p:nvSpPr>
+          <p:cNvPr id="2" name="TextBox 1"/>
+          <p:cNvSpPr txBox="1"/>
+          <p:nvPr/>
+        </p:nvSpPr>
+        <p:spPr>
+          <a:xfrm>
+            <a:off x="640080" y="2052828"/>
+            <a:ext cx="10911535" cy="731520"/>
+          </a:xfrm>
+          <a:prstGeom prst="rect">
+            <a:avLst/>
+          </a:prstGeom>
+          <a:noFill/>
+        </p:spPr>
+        <p:txBody>
+          <a:bodyPr wrap="square">
+            <a:spAutoFit/>
+          </a:bodyPr>
+          <a:lstStyle/>
+          <a:p>
+            <a:pPr algn="ctr"/>
+            <a:r>
+              <a:rPr sz="4800" b="1" i="0">
+                <a:solidFill>
+                  <a:srgbClr val="FFFFFF"/>
+                </a:solidFill>
+                <a:latin typeface="Arial"/>
+              </a:rPr>
+              <a:t>Tu estás aqui</a:t>
+            </a:r>
+          </a:p>
+        </p:txBody>
+      </p:sp>
+      <p:sp>
+        <p:nvSpPr>
+          <p:cNvPr id="3" name="TextBox 2"/>
+          <p:cNvSpPr txBox="1"/>
+          <p:nvPr/>
+        </p:nvSpPr>
+        <p:spPr>
+          <a:xfrm>
+            <a:off x="640080" y="2985516"/>
+            <a:ext cx="10911535" cy="731520"/>
+          </a:xfrm>
+          <a:prstGeom prst="rect">
+            <a:avLst/>
+          </a:prstGeom>
+          <a:noFill/>
+        </p:spPr>
+        <p:txBody>
+          <a:bodyPr wrap="square">
+            <a:spAutoFit/>
+          </a:bodyPr>
+          <a:lstStyle/>
+          <a:p>
+            <a:pPr algn="ctr"/>
+            <a:r>
+              <a:rPr sz="4800" b="1" i="0">
+                <a:solidFill>
+                  <a:srgbClr val="FFFFFF"/>
+                </a:solidFill>
+                <a:latin typeface="Arial"/>
+              </a:rPr>
+              <a:t>Deus de Promessas</a:t>
+            </a:r>
+          </a:p>
+        </p:txBody>
+      </p:sp>
+      <p:sp>
+        <p:nvSpPr>
+          <p:cNvPr id="4" name="TextBox 3"/>
+          <p:cNvSpPr txBox="1"/>
+          <p:nvPr/>
+        </p:nvSpPr>
+        <p:spPr>
+          <a:xfrm>
+            <a:off x="640080" y="4128516"/>
+            <a:ext cx="10911535" cy="310896"/>
+          </a:xfrm>
+          <a:prstGeom prst="rect">
+            <a:avLst/>
+          </a:prstGeom>
+          <a:noFill/>
+        </p:spPr>
+        <p:txBody>
+          <a:bodyPr wrap="square">
+            <a:spAutoFit/>
+          </a:bodyPr>
+          <a:lstStyle/>
+          <a:p>
+            <a:pPr algn="ctr"/>
+            <a:r>
+              <a:rPr sz="2000" b="0" i="0">
+                <a:solidFill>
+                  <a:srgbClr val="828282"/>
+                </a:solidFill>
+                <a:latin typeface="Arial"/>
+              </a:rPr>
+              <a:t>奇跡をおこして　約束を果たして 道ひらく神</a:t>
+            </a:r>
+          </a:p>
+        </p:txBody>
+      </p:sp>
+      <p:sp>
+        <p:nvSpPr>
+          <p:cNvPr id="5" name="TextBox 4"/>
+          <p:cNvSpPr txBox="1"/>
+          <p:nvPr/>
+        </p:nvSpPr>
+        <p:spPr>
+          <a:xfrm>
+            <a:off x="640080" y="4494276"/>
+            <a:ext cx="10911535" cy="310896"/>
+          </a:xfrm>
+          <a:prstGeom prst="rect">
+            <a:avLst/>
+          </a:prstGeom>
+          <a:noFill/>
+        </p:spPr>
+        <p:txBody>
+          <a:bodyPr wrap="square">
+            <a:spAutoFit/>
+          </a:bodyPr>
+          <a:lstStyle/>
+          <a:p>
+            <a:pPr algn="ctr"/>
+            <a:r>
+              <a:rPr sz="2000" b="0" i="0">
+                <a:solidFill>
+                  <a:srgbClr val="828282"/>
+                </a:solidFill>
+                <a:latin typeface="Arial"/>
+              </a:rPr>
+              <a:t>暗やみを照らし　光でみちびき 道ひらく神</a:t>
+            </a:r>
+          </a:p>
+        </p:txBody>
+      </p:sp>
+    </p:spTree>
+  </p:cSld>
+  <p:clrMapOvr>
+    <a:masterClrMapping/>
+  </p:clrMapOvr>
+</p:sld>
+</file>
+
+<file path=ppt/slides/slide14.xml><?xml version="1.0" encoding="utf-8"?>
+<p:sld xmlns:a="http://schemas.openxmlformats.org/drawingml/2006/main" xmlns:p="http://schemas.openxmlformats.org/presentationml/2006/main" xmlns:r="http://schemas.openxmlformats.org/officeDocument/2006/relationships">
+  <p:cSld>
+    <p:bg>
+      <p:bgPr>
+        <a:solidFill>
+          <a:srgbClr val="000000"/>
+        </a:solidFill>
+        <a:effectLst/>
+      </p:bgPr>
+    </p:bg>
+    <p:spTree>
+      <p:nvGrpSpPr>
+        <p:cNvPr id="1" name=""/>
+        <p:cNvGrpSpPr/>
+        <p:nvPr/>
+      </p:nvGrpSpPr>
+      <p:grpSpPr/>
+      <p:sp>
+        <p:nvSpPr>
+          <p:cNvPr id="2" name="TextBox 1"/>
+          <p:cNvSpPr txBox="1"/>
+          <p:nvPr/>
+        </p:nvSpPr>
+        <p:spPr>
+          <a:xfrm>
+            <a:off x="640080" y="2052828"/>
+            <a:ext cx="10911535" cy="731520"/>
+          </a:xfrm>
+          <a:prstGeom prst="rect">
+            <a:avLst/>
+          </a:prstGeom>
+          <a:noFill/>
+        </p:spPr>
+        <p:txBody>
+          <a:bodyPr wrap="square">
+            <a:spAutoFit/>
+          </a:bodyPr>
+          <a:lstStyle/>
+          <a:p>
+            <a:pPr algn="ctr"/>
+            <a:r>
+              <a:rPr sz="4800" b="1" i="0">
+                <a:solidFill>
+                  <a:srgbClr val="FFFFFF"/>
+                </a:solidFill>
+                <a:latin typeface="Arial"/>
+              </a:rPr>
+              <a:t>Luz na escuridão</a:t>
+            </a:r>
+          </a:p>
+        </p:txBody>
+      </p:sp>
+      <p:sp>
+        <p:nvSpPr>
+          <p:cNvPr id="3" name="TextBox 2"/>
+          <p:cNvSpPr txBox="1"/>
+          <p:nvPr/>
+        </p:nvSpPr>
+        <p:spPr>
+          <a:xfrm>
+            <a:off x="640080" y="2985516"/>
+            <a:ext cx="10911535" cy="731520"/>
+          </a:xfrm>
+          <a:prstGeom prst="rect">
+            <a:avLst/>
+          </a:prstGeom>
+          <a:noFill/>
+        </p:spPr>
+        <p:txBody>
+          <a:bodyPr wrap="square">
+            <a:spAutoFit/>
+          </a:bodyPr>
+          <a:lstStyle/>
+          <a:p>
+            <a:pPr algn="ctr"/>
+            <a:r>
+              <a:rPr sz="4800" b="1" i="0">
+                <a:solidFill>
+                  <a:srgbClr val="FFFFFF"/>
+                </a:solidFill>
+                <a:latin typeface="Arial"/>
+              </a:rPr>
               <a:t>Meu Deus</a:t>
-            </a:r>
-          </a:p>
-        </p:txBody>
-      </p:sp>
-      <p:sp>
-        <p:nvSpPr>
-          <p:cNvPr id="3" name="TextBox 2"/>
-          <p:cNvSpPr txBox="1"/>
-          <p:nvPr/>
-        </p:nvSpPr>
-        <p:spPr>
-          <a:xfrm>
-            <a:off x="594360" y="3616452"/>
-            <a:ext cx="11002975" cy="347472"/>
-          </a:xfrm>
-          <a:prstGeom prst="rect">
-            <a:avLst/>
-          </a:prstGeom>
-          <a:noFill/>
-        </p:spPr>
-        <p:txBody>
-          <a:bodyPr wrap="square">
-            <a:spAutoFit/>
-          </a:bodyPr>
-          <a:lstStyle/>
-          <a:p>
-            <a:pPr algn="ctr"/>
-            <a:r>
-              <a:rPr sz="2200" b="0" i="1">
-                <a:solidFill>
-                  <a:srgbClr val="8C8C8C"/>
-                </a:solidFill>
-                <a:latin typeface="Arial"/>
-              </a:rPr>
-              <a:t/>
             </a:r>
           </a:p>
         </p:txBody>
@@ -3849,23 +4253,23 @@
         </p:nvSpPr>
         <p:spPr>
           <a:xfrm>
-            <a:off x="594360" y="2258568"/>
-            <a:ext cx="11002975" cy="685800"/>
-          </a:xfrm>
-          <a:prstGeom prst="rect">
-            <a:avLst/>
-          </a:prstGeom>
-          <a:noFill/>
-        </p:spPr>
-        <p:txBody>
-          <a:bodyPr wrap="square">
-            <a:spAutoFit/>
-          </a:bodyPr>
-          <a:lstStyle/>
-          <a:p>
-            <a:pPr algn="ctr"/>
-            <a:r>
-              <a:rPr sz="4400" b="1" i="0">
+            <a:off x="640080" y="2052828"/>
+            <a:ext cx="10911535" cy="731520"/>
+          </a:xfrm>
+          <a:prstGeom prst="rect">
+            <a:avLst/>
+          </a:prstGeom>
+          <a:noFill/>
+        </p:spPr>
+        <p:txBody>
+          <a:bodyPr wrap="square">
+            <a:spAutoFit/>
+          </a:bodyPr>
+          <a:lstStyle/>
+          <a:p>
+            <a:pPr algn="ctr"/>
+            <a:r>
+              <a:rPr sz="4800" b="1" i="0">
                 <a:solidFill>
                   <a:srgbClr val="FFFFFF"/>
                 </a:solidFill>
@@ -3884,29 +4288,29 @@
         </p:nvSpPr>
         <p:spPr>
           <a:xfrm>
-            <a:off x="594360" y="2980944"/>
-            <a:ext cx="11002975" cy="347472"/>
-          </a:xfrm>
-          <a:prstGeom prst="rect">
-            <a:avLst/>
-          </a:prstGeom>
-          <a:noFill/>
-        </p:spPr>
-        <p:txBody>
-          <a:bodyPr wrap="square">
-            <a:spAutoFit/>
-          </a:bodyPr>
-          <a:lstStyle/>
-          <a:p>
-            <a:pPr algn="ctr"/>
-            <a:r>
-              <a:rPr sz="2200" b="0" i="1">
-                <a:solidFill>
-                  <a:srgbClr val="8C8C8C"/>
-                </a:solidFill>
-                <a:latin typeface="Arial"/>
-              </a:rPr>
-              <a:t/>
+            <a:off x="640080" y="2985516"/>
+            <a:ext cx="10911535" cy="731520"/>
+          </a:xfrm>
+          <a:prstGeom prst="rect">
+            <a:avLst/>
+          </a:prstGeom>
+          <a:noFill/>
+        </p:spPr>
+        <p:txBody>
+          <a:bodyPr wrap="square">
+            <a:spAutoFit/>
+          </a:bodyPr>
+          <a:lstStyle/>
+          <a:p>
+            <a:pPr algn="ctr"/>
+            <a:r>
+              <a:rPr sz="4800" b="1" i="0">
+                <a:solidFill>
+                  <a:srgbClr val="FFFFFF"/>
+                </a:solidFill>
+                <a:latin typeface="Arial"/>
+              </a:rPr>
+              <a:t>Eu Te adoro</a:t>
             </a:r>
           </a:p>
         </p:txBody>
@@ -3919,29 +4323,29 @@
         </p:nvSpPr>
         <p:spPr>
           <a:xfrm>
-            <a:off x="594360" y="3529584"/>
-            <a:ext cx="11002975" cy="685800"/>
-          </a:xfrm>
-          <a:prstGeom prst="rect">
-            <a:avLst/>
-          </a:prstGeom>
-          <a:noFill/>
-        </p:spPr>
-        <p:txBody>
-          <a:bodyPr wrap="square">
-            <a:spAutoFit/>
-          </a:bodyPr>
-          <a:lstStyle/>
-          <a:p>
-            <a:pPr algn="ctr"/>
-            <a:r>
-              <a:rPr sz="4400" b="1" i="0">
-                <a:solidFill>
-                  <a:srgbClr val="FFFFFF"/>
-                </a:solidFill>
-                <a:latin typeface="Arial"/>
-              </a:rPr>
-              <a:t>Eu Te adoro</a:t>
+            <a:off x="640080" y="4128516"/>
+            <a:ext cx="10911535" cy="310896"/>
+          </a:xfrm>
+          <a:prstGeom prst="rect">
+            <a:avLst/>
+          </a:prstGeom>
+          <a:noFill/>
+        </p:spPr>
+        <p:txBody>
+          <a:bodyPr wrap="square">
+            <a:spAutoFit/>
+          </a:bodyPr>
+          <a:lstStyle/>
+          <a:p>
+            <a:pPr algn="ctr"/>
+            <a:r>
+              <a:rPr sz="2000" b="0" i="0">
+                <a:solidFill>
+                  <a:srgbClr val="828282"/>
+                </a:solidFill>
+                <a:latin typeface="Arial"/>
+              </a:rPr>
+              <a:t>（主は）奇跡をおこして　約束を果たして 道ひらく神</a:t>
             </a:r>
           </a:p>
         </p:txBody>
@@ -3954,29 +4358,29 @@
         </p:nvSpPr>
         <p:spPr>
           <a:xfrm>
-            <a:off x="594360" y="4251960"/>
-            <a:ext cx="11002975" cy="347472"/>
-          </a:xfrm>
-          <a:prstGeom prst="rect">
-            <a:avLst/>
-          </a:prstGeom>
-          <a:noFill/>
-        </p:spPr>
-        <p:txBody>
-          <a:bodyPr wrap="square">
-            <a:spAutoFit/>
-          </a:bodyPr>
-          <a:lstStyle/>
-          <a:p>
-            <a:pPr algn="ctr"/>
-            <a:r>
-              <a:rPr sz="2200" b="0" i="1">
-                <a:solidFill>
-                  <a:srgbClr val="8C8C8C"/>
-                </a:solidFill>
-                <a:latin typeface="Arial"/>
-              </a:rPr>
-              <a:t/>
+            <a:off x="640080" y="4494276"/>
+            <a:ext cx="10911535" cy="310896"/>
+          </a:xfrm>
+          <a:prstGeom prst="rect">
+            <a:avLst/>
+          </a:prstGeom>
+          <a:noFill/>
+        </p:spPr>
+        <p:txBody>
+          <a:bodyPr wrap="square">
+            <a:spAutoFit/>
+          </a:bodyPr>
+          <a:lstStyle/>
+          <a:p>
+            <a:pPr algn="ctr"/>
+            <a:r>
+              <a:rPr sz="2000" b="0" i="0">
+                <a:solidFill>
+                  <a:srgbClr val="828282"/>
+                </a:solidFill>
+                <a:latin typeface="Arial"/>
+              </a:rPr>
+              <a:t>暗やみを照らし　光でみちびき 道ひらく神 (x2)</a:t>
             </a:r>
           </a:p>
         </p:txBody>
@@ -4015,23 +4419,23 @@
         </p:nvSpPr>
         <p:spPr>
           <a:xfrm>
-            <a:off x="594360" y="2894076"/>
-            <a:ext cx="11002975" cy="685800"/>
-          </a:xfrm>
-          <a:prstGeom prst="rect">
-            <a:avLst/>
-          </a:prstGeom>
-          <a:noFill/>
-        </p:spPr>
-        <p:txBody>
-          <a:bodyPr wrap="square">
-            <a:spAutoFit/>
-          </a:bodyPr>
-          <a:lstStyle/>
-          <a:p>
-            <a:pPr algn="ctr"/>
-            <a:r>
-              <a:rPr sz="4400" b="1" i="0">
+            <a:off x="640080" y="2052828"/>
+            <a:ext cx="10911535" cy="731520"/>
+          </a:xfrm>
+          <a:prstGeom prst="rect">
+            <a:avLst/>
+          </a:prstGeom>
+          <a:noFill/>
+        </p:spPr>
+        <p:txBody>
+          <a:bodyPr wrap="square">
+            <a:spAutoFit/>
+          </a:bodyPr>
+          <a:lstStyle/>
+          <a:p>
+            <a:pPr algn="ctr"/>
+            <a:r>
+              <a:rPr sz="4800" b="1" i="0">
                 <a:solidFill>
                   <a:srgbClr val="FFFFFF"/>
                 </a:solidFill>
@@ -4050,29 +4454,99 @@
         </p:nvSpPr>
         <p:spPr>
           <a:xfrm>
-            <a:off x="594360" y="3616452"/>
-            <a:ext cx="11002975" cy="347472"/>
-          </a:xfrm>
-          <a:prstGeom prst="rect">
-            <a:avLst/>
-          </a:prstGeom>
-          <a:noFill/>
-        </p:spPr>
-        <p:txBody>
-          <a:bodyPr wrap="square">
-            <a:spAutoFit/>
-          </a:bodyPr>
-          <a:lstStyle/>
-          <a:p>
-            <a:pPr algn="ctr"/>
-            <a:r>
-              <a:rPr sz="2200" b="0" i="1">
-                <a:solidFill>
-                  <a:srgbClr val="8C8C8C"/>
-                </a:solidFill>
-                <a:latin typeface="Arial"/>
-              </a:rPr>
-              <a:t/>
+            <a:off x="640080" y="2985516"/>
+            <a:ext cx="10911535" cy="731520"/>
+          </a:xfrm>
+          <a:prstGeom prst="rect">
+            <a:avLst/>
+          </a:prstGeom>
+          <a:noFill/>
+        </p:spPr>
+        <p:txBody>
+          <a:bodyPr wrap="square">
+            <a:spAutoFit/>
+          </a:bodyPr>
+          <a:lstStyle/>
+          <a:p>
+            <a:pPr algn="ctr"/>
+            <a:r>
+              <a:rPr sz="4800" b="1" i="0">
+                <a:solidFill>
+                  <a:srgbClr val="FFFFFF"/>
+                </a:solidFill>
+                <a:latin typeface="Arial"/>
+              </a:rPr>
+              <a:t>Deus de Promessas</a:t>
+            </a:r>
+          </a:p>
+        </p:txBody>
+      </p:sp>
+      <p:sp>
+        <p:nvSpPr>
+          <p:cNvPr id="4" name="TextBox 3"/>
+          <p:cNvSpPr txBox="1"/>
+          <p:nvPr/>
+        </p:nvSpPr>
+        <p:spPr>
+          <a:xfrm>
+            <a:off x="640080" y="4128516"/>
+            <a:ext cx="10911535" cy="310896"/>
+          </a:xfrm>
+          <a:prstGeom prst="rect">
+            <a:avLst/>
+          </a:prstGeom>
+          <a:noFill/>
+        </p:spPr>
+        <p:txBody>
+          <a:bodyPr wrap="square">
+            <a:spAutoFit/>
+          </a:bodyPr>
+          <a:lstStyle/>
+          <a:p>
+            <a:pPr algn="ctr"/>
+            <a:r>
+              <a:rPr sz="2000" b="0" i="0">
+                <a:solidFill>
+                  <a:srgbClr val="828282"/>
+                </a:solidFill>
+                <a:latin typeface="Arial"/>
+              </a:rPr>
+              <a:t>奇跡をおこして　約束を果たして 道ひらく神</a:t>
+            </a:r>
+          </a:p>
+        </p:txBody>
+      </p:sp>
+      <p:sp>
+        <p:nvSpPr>
+          <p:cNvPr id="5" name="TextBox 4"/>
+          <p:cNvSpPr txBox="1"/>
+          <p:nvPr/>
+        </p:nvSpPr>
+        <p:spPr>
+          <a:xfrm>
+            <a:off x="640080" y="4494276"/>
+            <a:ext cx="10911535" cy="310896"/>
+          </a:xfrm>
+          <a:prstGeom prst="rect">
+            <a:avLst/>
+          </a:prstGeom>
+          <a:noFill/>
+        </p:spPr>
+        <p:txBody>
+          <a:bodyPr wrap="square">
+            <a:spAutoFit/>
+          </a:bodyPr>
+          <a:lstStyle/>
+          <a:p>
+            <a:pPr algn="ctr"/>
+            <a:r>
+              <a:rPr sz="2000" b="0" i="0">
+                <a:solidFill>
+                  <a:srgbClr val="828282"/>
+                </a:solidFill>
+                <a:latin typeface="Arial"/>
+              </a:rPr>
+              <a:t>暗やみを照らし　光でみちびき 道ひらく神</a:t>
             </a:r>
           </a:p>
         </p:txBody>
@@ -4111,29 +4585,29 @@
         </p:nvSpPr>
         <p:spPr>
           <a:xfrm>
-            <a:off x="594360" y="1837944"/>
-            <a:ext cx="11002975" cy="685800"/>
-          </a:xfrm>
-          <a:prstGeom prst="rect">
-            <a:avLst/>
-          </a:prstGeom>
-          <a:noFill/>
-        </p:spPr>
-        <p:txBody>
-          <a:bodyPr wrap="square">
-            <a:spAutoFit/>
-          </a:bodyPr>
-          <a:lstStyle/>
-          <a:p>
-            <a:pPr algn="ctr"/>
-            <a:r>
-              <a:rPr sz="4223" b="1" i="0">
+            <a:off x="640080" y="2052828"/>
+            <a:ext cx="10911535" cy="731520"/>
+          </a:xfrm>
+          <a:prstGeom prst="rect">
+            <a:avLst/>
+          </a:prstGeom>
+          <a:noFill/>
+        </p:spPr>
+        <p:txBody>
+          <a:bodyPr wrap="square">
+            <a:spAutoFit/>
+          </a:bodyPr>
+          <a:lstStyle/>
+          <a:p>
+            <a:pPr algn="ctr"/>
+            <a:r>
+              <a:rPr sz="4800" b="1" i="0">
                 <a:solidFill>
                   <a:srgbClr val="FFFFFF"/>
                 </a:solidFill>
                 <a:latin typeface="Arial"/>
               </a:rPr>
-              <a:t>新しくしてくれる  --&gt;  あなたがをあがめよう</a:t>
+              <a:t>Luz na escuridão</a:t>
             </a:r>
           </a:p>
         </p:txBody>
@@ -4146,169 +4620,29 @@
         </p:nvSpPr>
         <p:spPr>
           <a:xfrm>
-            <a:off x="594360" y="2560320"/>
-            <a:ext cx="11002975" cy="384048"/>
-          </a:xfrm>
-          <a:prstGeom prst="rect">
-            <a:avLst/>
-          </a:prstGeom>
-          <a:noFill/>
-        </p:spPr>
-        <p:txBody>
-          <a:bodyPr wrap="square">
-            <a:spAutoFit/>
-          </a:bodyPr>
-          <a:lstStyle/>
-          <a:p>
-            <a:pPr algn="ctr"/>
-            <a:r>
-              <a:rPr sz="2400" b="0" i="1">
-                <a:solidFill>
-                  <a:srgbClr val="B4B4B4"/>
-                </a:solidFill>
-                <a:latin typeface="Arial"/>
-              </a:rPr>
-              <a:t>Atarashiku shite kureru  Anatawo Agameyou</a:t>
-            </a:r>
-          </a:p>
-        </p:txBody>
-      </p:sp>
-      <p:sp>
-        <p:nvSpPr>
-          <p:cNvPr id="4" name="TextBox 3"/>
-          <p:cNvSpPr txBox="1"/>
-          <p:nvPr/>
-        </p:nvSpPr>
-        <p:spPr>
-          <a:xfrm>
-            <a:off x="594360" y="2980944"/>
-            <a:ext cx="11002975" cy="347472"/>
-          </a:xfrm>
-          <a:prstGeom prst="rect">
-            <a:avLst/>
-          </a:prstGeom>
-          <a:noFill/>
-        </p:spPr>
-        <p:txBody>
-          <a:bodyPr wrap="square">
-            <a:spAutoFit/>
-          </a:bodyPr>
-          <a:lstStyle/>
-          <a:p>
-            <a:pPr algn="ctr"/>
-            <a:r>
-              <a:rPr sz="2000" b="0" i="1">
-                <a:solidFill>
-                  <a:srgbClr val="8C8C8C"/>
-                </a:solidFill>
-                <a:latin typeface="Arial"/>
-              </a:rPr>
-              <a:t/>
-            </a:r>
-          </a:p>
-        </p:txBody>
-      </p:sp>
-      <p:sp>
-        <p:nvSpPr>
-          <p:cNvPr id="5" name="TextBox 4"/>
-          <p:cNvSpPr txBox="1"/>
-          <p:nvPr/>
-        </p:nvSpPr>
-        <p:spPr>
-          <a:xfrm>
-            <a:off x="594360" y="3529584"/>
-            <a:ext cx="11002975" cy="685800"/>
-          </a:xfrm>
-          <a:prstGeom prst="rect">
-            <a:avLst/>
-          </a:prstGeom>
-          <a:noFill/>
-        </p:spPr>
-        <p:txBody>
-          <a:bodyPr wrap="square">
-            <a:spAutoFit/>
-          </a:bodyPr>
-          <a:lstStyle/>
-          <a:p>
-            <a:pPr algn="ctr"/>
-            <a:r>
-              <a:rPr sz="4061" b="1" i="0">
+            <a:off x="640080" y="2985516"/>
+            <a:ext cx="10911535" cy="731520"/>
+          </a:xfrm>
+          <a:prstGeom prst="rect">
+            <a:avLst/>
+          </a:prstGeom>
+          <a:noFill/>
+        </p:spPr>
+        <p:txBody>
+          <a:bodyPr wrap="square">
+            <a:spAutoFit/>
+          </a:bodyPr>
+          <a:lstStyle/>
+          <a:p>
+            <a:pPr algn="ctr"/>
+            <a:r>
+              <a:rPr sz="4800" b="1" i="0">
                 <a:solidFill>
                   <a:srgbClr val="FFFFFF"/>
                 </a:solidFill>
                 <a:latin typeface="Arial"/>
               </a:rPr>
-              <a:t>心　なおしてくれる  --&gt;  あなたがをあがめよう</a:t>
-            </a:r>
-          </a:p>
-        </p:txBody>
-      </p:sp>
-      <p:sp>
-        <p:nvSpPr>
-          <p:cNvPr id="6" name="TextBox 5"/>
-          <p:cNvSpPr txBox="1"/>
-          <p:nvPr/>
-        </p:nvSpPr>
-        <p:spPr>
-          <a:xfrm>
-            <a:off x="594360" y="4251960"/>
-            <a:ext cx="11002975" cy="384048"/>
-          </a:xfrm>
-          <a:prstGeom prst="rect">
-            <a:avLst/>
-          </a:prstGeom>
-          <a:noFill/>
-        </p:spPr>
-        <p:txBody>
-          <a:bodyPr wrap="square">
-            <a:spAutoFit/>
-          </a:bodyPr>
-          <a:lstStyle/>
-          <a:p>
-            <a:pPr algn="ctr"/>
-            <a:r>
-              <a:rPr sz="2400" b="0" i="1">
-                <a:solidFill>
-                  <a:srgbClr val="B4B4B4"/>
-                </a:solidFill>
-                <a:latin typeface="Arial"/>
-              </a:rPr>
-              <a:t>Kokoro Naoshite kureru   Anatawo Agameyou</a:t>
-            </a:r>
-          </a:p>
-        </p:txBody>
-      </p:sp>
-      <p:sp>
-        <p:nvSpPr>
-          <p:cNvPr id="7" name="TextBox 6"/>
-          <p:cNvSpPr txBox="1"/>
-          <p:nvPr/>
-        </p:nvSpPr>
-        <p:spPr>
-          <a:xfrm>
-            <a:off x="594360" y="4672584"/>
-            <a:ext cx="11002975" cy="347472"/>
-          </a:xfrm>
-          <a:prstGeom prst="rect">
-            <a:avLst/>
-          </a:prstGeom>
-          <a:noFill/>
-        </p:spPr>
-        <p:txBody>
-          <a:bodyPr wrap="square">
-            <a:spAutoFit/>
-          </a:bodyPr>
-          <a:lstStyle/>
-          <a:p>
-            <a:pPr algn="ctr"/>
-            <a:r>
-              <a:rPr sz="2000" b="0" i="1">
-                <a:solidFill>
-                  <a:srgbClr val="8C8C8C"/>
-                </a:solidFill>
-                <a:latin typeface="Arial"/>
-              </a:rPr>
-              <a:t/>
+              <a:t>Meu Deus</a:t>
             </a:r>
           </a:p>
         </p:txBody>
@@ -4347,29 +4681,29 @@
         </p:nvSpPr>
         <p:spPr>
           <a:xfrm>
-            <a:off x="594360" y="1837944"/>
-            <a:ext cx="11002975" cy="685800"/>
-          </a:xfrm>
-          <a:prstGeom prst="rect">
-            <a:avLst/>
-          </a:prstGeom>
-          <a:noFill/>
-        </p:spPr>
-        <p:txBody>
-          <a:bodyPr wrap="square">
-            <a:spAutoFit/>
-          </a:bodyPr>
-          <a:lstStyle/>
-          <a:p>
-            <a:pPr algn="ctr"/>
-            <a:r>
-              <a:rPr sz="4223" b="1" i="0">
+            <a:off x="640080" y="1650492"/>
+            <a:ext cx="10911535" cy="731520"/>
+          </a:xfrm>
+          <a:prstGeom prst="rect">
+            <a:avLst/>
+          </a:prstGeom>
+          <a:noFill/>
+        </p:spPr>
+        <p:txBody>
+          <a:bodyPr wrap="square">
+            <a:spAutoFit/>
+          </a:bodyPr>
+          <a:lstStyle/>
+          <a:p>
+            <a:pPr algn="ctr"/>
+            <a:r>
+              <a:rPr sz="4600" b="1" i="0">
                 <a:solidFill>
                   <a:srgbClr val="FFFFFF"/>
                 </a:solidFill>
                 <a:latin typeface="Arial"/>
               </a:rPr>
-              <a:t>（主は）奇跡をおこして　約束を果たして 道ひらく神</a:t>
+              <a:t>新しくしてくれる  --&gt;  あなたがをあがめよう</a:t>
             </a:r>
           </a:p>
         </p:txBody>
@@ -4382,29 +4716,29 @@
         </p:nvSpPr>
         <p:spPr>
           <a:xfrm>
-            <a:off x="594360" y="2560320"/>
-            <a:ext cx="11002975" cy="384048"/>
-          </a:xfrm>
-          <a:prstGeom prst="rect">
-            <a:avLst/>
-          </a:prstGeom>
-          <a:noFill/>
-        </p:spPr>
-        <p:txBody>
-          <a:bodyPr wrap="square">
-            <a:spAutoFit/>
-          </a:bodyPr>
-          <a:lstStyle/>
-          <a:p>
-            <a:pPr algn="ctr"/>
-            <a:r>
-              <a:rPr sz="1737" b="0" i="1">
-                <a:solidFill>
-                  <a:srgbClr val="B4B4B4"/>
-                </a:solidFill>
-                <a:latin typeface="Arial"/>
-              </a:rPr>
-              <a:t>Kisekiwo Okoshite, Yakusokuwo Hatashite, Michi Hiraku Kami</a:t>
+            <a:off x="640080" y="2418588"/>
+            <a:ext cx="10911535" cy="365760"/>
+          </a:xfrm>
+          <a:prstGeom prst="rect">
+            <a:avLst/>
+          </a:prstGeom>
+          <a:noFill/>
+        </p:spPr>
+        <p:txBody>
+          <a:bodyPr wrap="square">
+            <a:spAutoFit/>
+          </a:bodyPr>
+          <a:lstStyle/>
+          <a:p>
+            <a:pPr algn="ctr"/>
+            <a:r>
+              <a:rPr sz="2400" b="0" i="1">
+                <a:solidFill>
+                  <a:srgbClr val="AAAAAA"/>
+                </a:solidFill>
+                <a:latin typeface="Arial"/>
+              </a:rPr>
+              <a:t>Atarashiku shite kureru  Anatawo Agameyou</a:t>
             </a:r>
           </a:p>
         </p:txBody>
@@ -4417,8 +4751,78 @@
         </p:nvSpPr>
         <p:spPr>
           <a:xfrm>
-            <a:off x="594360" y="2980944"/>
-            <a:ext cx="11002975" cy="347472"/>
+            <a:off x="640080" y="2985516"/>
+            <a:ext cx="10911535" cy="731520"/>
+          </a:xfrm>
+          <a:prstGeom prst="rect">
+            <a:avLst/>
+          </a:prstGeom>
+          <a:noFill/>
+        </p:spPr>
+        <p:txBody>
+          <a:bodyPr wrap="square">
+            <a:spAutoFit/>
+          </a:bodyPr>
+          <a:lstStyle/>
+          <a:p>
+            <a:pPr algn="ctr"/>
+            <a:r>
+              <a:rPr sz="4400" b="1" i="0">
+                <a:solidFill>
+                  <a:srgbClr val="FFFFFF"/>
+                </a:solidFill>
+                <a:latin typeface="Arial"/>
+              </a:rPr>
+              <a:t>心　なおしてくれる  --&gt;  あなたがをあがめよう</a:t>
+            </a:r>
+          </a:p>
+        </p:txBody>
+      </p:sp>
+      <p:sp>
+        <p:nvSpPr>
+          <p:cNvPr id="5" name="TextBox 4"/>
+          <p:cNvSpPr txBox="1"/>
+          <p:nvPr/>
+        </p:nvSpPr>
+        <p:spPr>
+          <a:xfrm>
+            <a:off x="640080" y="3753612"/>
+            <a:ext cx="10911535" cy="365760"/>
+          </a:xfrm>
+          <a:prstGeom prst="rect">
+            <a:avLst/>
+          </a:prstGeom>
+          <a:noFill/>
+        </p:spPr>
+        <p:txBody>
+          <a:bodyPr wrap="square">
+            <a:spAutoFit/>
+          </a:bodyPr>
+          <a:lstStyle/>
+          <a:p>
+            <a:pPr algn="ctr"/>
+            <a:r>
+              <a:rPr sz="2400" b="0" i="1">
+                <a:solidFill>
+                  <a:srgbClr val="AAAAAA"/>
+                </a:solidFill>
+                <a:latin typeface="Arial"/>
+              </a:rPr>
+              <a:t>Kokoro Naoshite kureru   Anatawo Agameyou</a:t>
+            </a:r>
+          </a:p>
+        </p:txBody>
+      </p:sp>
+      <p:sp>
+        <p:nvSpPr>
+          <p:cNvPr id="6" name="TextBox 5"/>
+          <p:cNvSpPr txBox="1"/>
+          <p:nvPr/>
+        </p:nvSpPr>
+        <p:spPr>
+          <a:xfrm>
+            <a:off x="640080" y="4530852"/>
+            <a:ext cx="10911535" cy="310896"/>
           </a:xfrm>
           <a:prstGeom prst="rect">
             <a:avLst/>
@@ -4435,81 +4839,11 @@
             <a:r>
               <a:rPr sz="2000" b="0" i="1">
                 <a:solidFill>
-                  <a:srgbClr val="8C8C8C"/>
-                </a:solidFill>
-                <a:latin typeface="Arial"/>
-              </a:rPr>
-              <a:t/>
-            </a:r>
-          </a:p>
-        </p:txBody>
-      </p:sp>
-      <p:sp>
-        <p:nvSpPr>
-          <p:cNvPr id="5" name="TextBox 4"/>
-          <p:cNvSpPr txBox="1"/>
-          <p:nvPr/>
-        </p:nvSpPr>
-        <p:spPr>
-          <a:xfrm>
-            <a:off x="594360" y="3529584"/>
-            <a:ext cx="11002975" cy="685800"/>
-          </a:xfrm>
-          <a:prstGeom prst="rect">
-            <a:avLst/>
-          </a:prstGeom>
-          <a:noFill/>
-        </p:spPr>
-        <p:txBody>
-          <a:bodyPr wrap="square">
-            <a:spAutoFit/>
-          </a:bodyPr>
-          <a:lstStyle/>
-          <a:p>
-            <a:pPr algn="ctr"/>
-            <a:r>
-              <a:rPr sz="4223" b="1" i="0">
-                <a:solidFill>
-                  <a:srgbClr val="FFFFFF"/>
-                </a:solidFill>
-                <a:latin typeface="Arial"/>
-              </a:rPr>
-              <a:t>暗やみを照らし　光でみちびき 道ひらく神 (x2)</a:t>
-            </a:r>
-          </a:p>
-        </p:txBody>
-      </p:sp>
-      <p:sp>
-        <p:nvSpPr>
-          <p:cNvPr id="6" name="TextBox 5"/>
-          <p:cNvSpPr txBox="1"/>
-          <p:nvPr/>
-        </p:nvSpPr>
-        <p:spPr>
-          <a:xfrm>
-            <a:off x="594360" y="4251960"/>
-            <a:ext cx="11002975" cy="384048"/>
-          </a:xfrm>
-          <a:prstGeom prst="rect">
-            <a:avLst/>
-          </a:prstGeom>
-          <a:noFill/>
-        </p:spPr>
-        <p:txBody>
-          <a:bodyPr wrap="square">
-            <a:spAutoFit/>
-          </a:bodyPr>
-          <a:lstStyle/>
-          <a:p>
-            <a:pPr algn="ctr"/>
-            <a:r>
-              <a:rPr sz="1768" b="0" i="1">
-                <a:solidFill>
-                  <a:srgbClr val="B4B4B4"/>
-                </a:solidFill>
-                <a:latin typeface="Arial"/>
-              </a:rPr>
-              <a:t>Kurayamiwo Terashi, Hikaride Michibiki, Michi Hiraku Kami</a:t>
+                  <a:srgbClr val="828282"/>
+                </a:solidFill>
+                <a:latin typeface="Arial"/>
+              </a:rPr>
+              <a:t>Transformando destinos</a:t>
             </a:r>
           </a:p>
         </p:txBody>
@@ -4522,8 +4856,8 @@
         </p:nvSpPr>
         <p:spPr>
           <a:xfrm>
-            <a:off x="594360" y="4672584"/>
-            <a:ext cx="11002975" cy="347472"/>
+            <a:off x="640080" y="4896612"/>
+            <a:ext cx="10911535" cy="310896"/>
           </a:xfrm>
           <a:prstGeom prst="rect">
             <a:avLst/>
@@ -4540,11 +4874,11 @@
             <a:r>
               <a:rPr sz="2000" b="0" i="1">
                 <a:solidFill>
-                  <a:srgbClr val="8C8C8C"/>
-                </a:solidFill>
-                <a:latin typeface="Arial"/>
-              </a:rPr>
-              <a:t/>
+                  <a:srgbClr val="828282"/>
+                </a:solidFill>
+                <a:latin typeface="Arial"/>
+              </a:rPr>
+              <a:t>Tu estás aqui</a:t>
             </a:r>
           </a:p>
         </p:txBody>
@@ -4583,29 +4917,29 @@
         </p:nvSpPr>
         <p:spPr>
           <a:xfrm>
-            <a:off x="594360" y="2258568"/>
-            <a:ext cx="11002975" cy="685800"/>
-          </a:xfrm>
-          <a:prstGeom prst="rect">
-            <a:avLst/>
-          </a:prstGeom>
-          <a:noFill/>
-        </p:spPr>
-        <p:txBody>
-          <a:bodyPr wrap="square">
-            <a:spAutoFit/>
-          </a:bodyPr>
-          <a:lstStyle/>
-          <a:p>
-            <a:pPr algn="ctr"/>
-            <a:r>
-              <a:rPr sz="4400" b="1" i="0">
+            <a:off x="640080" y="1650492"/>
+            <a:ext cx="10911535" cy="731520"/>
+          </a:xfrm>
+          <a:prstGeom prst="rect">
+            <a:avLst/>
+          </a:prstGeom>
+          <a:noFill/>
+        </p:spPr>
+        <p:txBody>
+          <a:bodyPr wrap="square">
+            <a:spAutoFit/>
+          </a:bodyPr>
+          <a:lstStyle/>
+          <a:p>
+            <a:pPr algn="ctr"/>
+            <a:r>
+              <a:rPr sz="4600" b="1" i="0">
                 <a:solidFill>
                   <a:srgbClr val="FFFFFF"/>
                 </a:solidFill>
                 <a:latin typeface="Arial"/>
               </a:rPr>
-              <a:t>Tu estás aqui</a:t>
+              <a:t>（主は）奇跡をおこして　約束を果たして 道ひらく神</a:t>
             </a:r>
           </a:p>
         </p:txBody>
@@ -4618,29 +4952,29 @@
         </p:nvSpPr>
         <p:spPr>
           <a:xfrm>
-            <a:off x="594360" y="2980944"/>
-            <a:ext cx="11002975" cy="347472"/>
-          </a:xfrm>
-          <a:prstGeom prst="rect">
-            <a:avLst/>
-          </a:prstGeom>
-          <a:noFill/>
-        </p:spPr>
-        <p:txBody>
-          <a:bodyPr wrap="square">
-            <a:spAutoFit/>
-          </a:bodyPr>
-          <a:lstStyle/>
-          <a:p>
-            <a:pPr algn="ctr"/>
-            <a:r>
-              <a:rPr sz="2200" b="0" i="1">
-                <a:solidFill>
-                  <a:srgbClr val="8C8C8C"/>
-                </a:solidFill>
-                <a:latin typeface="Arial"/>
-              </a:rPr>
-              <a:t/>
+            <a:off x="640080" y="2418588"/>
+            <a:ext cx="10911535" cy="365760"/>
+          </a:xfrm>
+          <a:prstGeom prst="rect">
+            <a:avLst/>
+          </a:prstGeom>
+          <a:noFill/>
+        </p:spPr>
+        <p:txBody>
+          <a:bodyPr wrap="square">
+            <a:spAutoFit/>
+          </a:bodyPr>
+          <a:lstStyle/>
+          <a:p>
+            <a:pPr algn="ctr"/>
+            <a:r>
+              <a:rPr sz="2100" b="0" i="1">
+                <a:solidFill>
+                  <a:srgbClr val="AAAAAA"/>
+                </a:solidFill>
+                <a:latin typeface="Arial"/>
+              </a:rPr>
+              <a:t>Kisekiwo Okoshite, Yakusokuwo Hatashite, Michi Hiraku Kami</a:t>
             </a:r>
           </a:p>
         </p:txBody>
@@ -4653,29 +4987,29 @@
         </p:nvSpPr>
         <p:spPr>
           <a:xfrm>
-            <a:off x="594360" y="3529584"/>
-            <a:ext cx="11002975" cy="685800"/>
-          </a:xfrm>
-          <a:prstGeom prst="rect">
-            <a:avLst/>
-          </a:prstGeom>
-          <a:noFill/>
-        </p:spPr>
-        <p:txBody>
-          <a:bodyPr wrap="square">
-            <a:spAutoFit/>
-          </a:bodyPr>
-          <a:lstStyle/>
-          <a:p>
-            <a:pPr algn="ctr"/>
-            <a:r>
-              <a:rPr sz="4400" b="1" i="0">
+            <a:off x="640080" y="2985516"/>
+            <a:ext cx="10911535" cy="731520"/>
+          </a:xfrm>
+          <a:prstGeom prst="rect">
+            <a:avLst/>
+          </a:prstGeom>
+          <a:noFill/>
+        </p:spPr>
+        <p:txBody>
+          <a:bodyPr wrap="square">
+            <a:spAutoFit/>
+          </a:bodyPr>
+          <a:lstStyle/>
+          <a:p>
+            <a:pPr algn="ctr"/>
+            <a:r>
+              <a:rPr sz="4600" b="1" i="0">
                 <a:solidFill>
                   <a:srgbClr val="FFFFFF"/>
                 </a:solidFill>
                 <a:latin typeface="Arial"/>
               </a:rPr>
-              <a:t>Realizando milagres</a:t>
+              <a:t>暗やみを照らし　光でみちびき 道ひらく神 (x2)</a:t>
             </a:r>
           </a:p>
         </p:txBody>
@@ -4688,29 +5022,99 @@
         </p:nvSpPr>
         <p:spPr>
           <a:xfrm>
-            <a:off x="594360" y="4251960"/>
-            <a:ext cx="11002975" cy="347472"/>
-          </a:xfrm>
-          <a:prstGeom prst="rect">
-            <a:avLst/>
-          </a:prstGeom>
-          <a:noFill/>
-        </p:spPr>
-        <p:txBody>
-          <a:bodyPr wrap="square">
-            <a:spAutoFit/>
-          </a:bodyPr>
-          <a:lstStyle/>
-          <a:p>
-            <a:pPr algn="ctr"/>
-            <a:r>
-              <a:rPr sz="2200" b="0" i="1">
-                <a:solidFill>
-                  <a:srgbClr val="8C8C8C"/>
-                </a:solidFill>
-                <a:latin typeface="Arial"/>
-              </a:rPr>
-              <a:t/>
+            <a:off x="640080" y="3753612"/>
+            <a:ext cx="10911535" cy="365760"/>
+          </a:xfrm>
+          <a:prstGeom prst="rect">
+            <a:avLst/>
+          </a:prstGeom>
+          <a:noFill/>
+        </p:spPr>
+        <p:txBody>
+          <a:bodyPr wrap="square">
+            <a:spAutoFit/>
+          </a:bodyPr>
+          <a:lstStyle/>
+          <a:p>
+            <a:pPr algn="ctr"/>
+            <a:r>
+              <a:rPr sz="2100" b="0" i="1">
+                <a:solidFill>
+                  <a:srgbClr val="AAAAAA"/>
+                </a:solidFill>
+                <a:latin typeface="Arial"/>
+              </a:rPr>
+              <a:t>Kurayamiwo Terashi, Hikaride Michibiki, Michi Hiraku Kami</a:t>
+            </a:r>
+          </a:p>
+        </p:txBody>
+      </p:sp>
+      <p:sp>
+        <p:nvSpPr>
+          <p:cNvPr id="6" name="TextBox 5"/>
+          <p:cNvSpPr txBox="1"/>
+          <p:nvPr/>
+        </p:nvSpPr>
+        <p:spPr>
+          <a:xfrm>
+            <a:off x="640080" y="4530852"/>
+            <a:ext cx="10911535" cy="310896"/>
+          </a:xfrm>
+          <a:prstGeom prst="rect">
+            <a:avLst/>
+          </a:prstGeom>
+          <a:noFill/>
+        </p:spPr>
+        <p:txBody>
+          <a:bodyPr wrap="square">
+            <a:spAutoFit/>
+          </a:bodyPr>
+          <a:lstStyle/>
+          <a:p>
+            <a:pPr algn="ctr"/>
+            <a:r>
+              <a:rPr sz="2000" b="0" i="1">
+                <a:solidFill>
+                  <a:srgbClr val="828282"/>
+                </a:solidFill>
+                <a:latin typeface="Arial"/>
+              </a:rPr>
+              <a:t>Movendo-se entre nós</a:t>
+            </a:r>
+          </a:p>
+        </p:txBody>
+      </p:sp>
+      <p:sp>
+        <p:nvSpPr>
+          <p:cNvPr id="7" name="TextBox 6"/>
+          <p:cNvSpPr txBox="1"/>
+          <p:nvPr/>
+        </p:nvSpPr>
+        <p:spPr>
+          <a:xfrm>
+            <a:off x="640080" y="4896612"/>
+            <a:ext cx="10911535" cy="310896"/>
+          </a:xfrm>
+          <a:prstGeom prst="rect">
+            <a:avLst/>
+          </a:prstGeom>
+          <a:noFill/>
+        </p:spPr>
+        <p:txBody>
+          <a:bodyPr wrap="square">
+            <a:spAutoFit/>
+          </a:bodyPr>
+          <a:lstStyle/>
+          <a:p>
+            <a:pPr algn="ctr"/>
+            <a:r>
+              <a:rPr sz="2000" b="0" i="1">
+                <a:solidFill>
+                  <a:srgbClr val="828282"/>
+                </a:solidFill>
+                <a:latin typeface="Arial"/>
+              </a:rPr>
+              <a:t>Eu Te adoro</a:t>
             </a:r>
           </a:p>
         </p:txBody>
@@ -4749,29 +5153,29 @@
         </p:nvSpPr>
         <p:spPr>
           <a:xfrm>
-            <a:off x="594360" y="2258568"/>
-            <a:ext cx="11002975" cy="685800"/>
-          </a:xfrm>
-          <a:prstGeom prst="rect">
-            <a:avLst/>
-          </a:prstGeom>
-          <a:noFill/>
-        </p:spPr>
-        <p:txBody>
-          <a:bodyPr wrap="square">
-            <a:spAutoFit/>
-          </a:bodyPr>
-          <a:lstStyle/>
-          <a:p>
-            <a:pPr algn="ctr"/>
-            <a:r>
-              <a:rPr sz="4400" b="1" i="0">
+            <a:off x="640080" y="2052828"/>
+            <a:ext cx="10911535" cy="731520"/>
+          </a:xfrm>
+          <a:prstGeom prst="rect">
+            <a:avLst/>
+          </a:prstGeom>
+          <a:noFill/>
+        </p:spPr>
+        <p:txBody>
+          <a:bodyPr wrap="square">
+            <a:spAutoFit/>
+          </a:bodyPr>
+          <a:lstStyle/>
+          <a:p>
+            <a:pPr algn="ctr"/>
+            <a:r>
+              <a:rPr sz="4800" b="1" i="0">
                 <a:solidFill>
                   <a:srgbClr val="FFFFFF"/>
                 </a:solidFill>
                 <a:latin typeface="Arial"/>
               </a:rPr>
-              <a:t>Caminho no Deserto</a:t>
+              <a:t>Tu estás aqui</a:t>
             </a:r>
           </a:p>
         </p:txBody>
@@ -4784,29 +5188,29 @@
         </p:nvSpPr>
         <p:spPr>
           <a:xfrm>
-            <a:off x="594360" y="2980944"/>
-            <a:ext cx="11002975" cy="347472"/>
-          </a:xfrm>
-          <a:prstGeom prst="rect">
-            <a:avLst/>
-          </a:prstGeom>
-          <a:noFill/>
-        </p:spPr>
-        <p:txBody>
-          <a:bodyPr wrap="square">
-            <a:spAutoFit/>
-          </a:bodyPr>
-          <a:lstStyle/>
-          <a:p>
-            <a:pPr algn="ctr"/>
-            <a:r>
-              <a:rPr sz="2200" b="0" i="1">
-                <a:solidFill>
-                  <a:srgbClr val="8C8C8C"/>
-                </a:solidFill>
-                <a:latin typeface="Arial"/>
-              </a:rPr>
-              <a:t/>
+            <a:off x="640080" y="2985516"/>
+            <a:ext cx="10911535" cy="731520"/>
+          </a:xfrm>
+          <a:prstGeom prst="rect">
+            <a:avLst/>
+          </a:prstGeom>
+          <a:noFill/>
+        </p:spPr>
+        <p:txBody>
+          <a:bodyPr wrap="square">
+            <a:spAutoFit/>
+          </a:bodyPr>
+          <a:lstStyle/>
+          <a:p>
+            <a:pPr algn="ctr"/>
+            <a:r>
+              <a:rPr sz="4800" b="1" i="0">
+                <a:solidFill>
+                  <a:srgbClr val="FFFFFF"/>
+                </a:solidFill>
+                <a:latin typeface="Arial"/>
+              </a:rPr>
+              <a:t>Realizando milagres</a:t>
             </a:r>
           </a:p>
         </p:txBody>
@@ -4819,29 +5223,29 @@
         </p:nvSpPr>
         <p:spPr>
           <a:xfrm>
-            <a:off x="594360" y="3529584"/>
-            <a:ext cx="11002975" cy="685800"/>
-          </a:xfrm>
-          <a:prstGeom prst="rect">
-            <a:avLst/>
-          </a:prstGeom>
-          <a:noFill/>
-        </p:spPr>
-        <p:txBody>
-          <a:bodyPr wrap="square">
-            <a:spAutoFit/>
-          </a:bodyPr>
-          <a:lstStyle/>
-          <a:p>
-            <a:pPr algn="ctr"/>
-            <a:r>
-              <a:rPr sz="4400" b="1" i="0">
-                <a:solidFill>
-                  <a:srgbClr val="FFFFFF"/>
-                </a:solidFill>
-                <a:latin typeface="Arial"/>
-              </a:rPr>
-              <a:t>Deus de Milagres</a:t>
+            <a:off x="640080" y="4128516"/>
+            <a:ext cx="10911535" cy="310896"/>
+          </a:xfrm>
+          <a:prstGeom prst="rect">
+            <a:avLst/>
+          </a:prstGeom>
+          <a:noFill/>
+        </p:spPr>
+        <p:txBody>
+          <a:bodyPr wrap="square">
+            <a:spAutoFit/>
+          </a:bodyPr>
+          <a:lstStyle/>
+          <a:p>
+            <a:pPr algn="ctr"/>
+            <a:r>
+              <a:rPr sz="2000" b="0" i="0">
+                <a:solidFill>
+                  <a:srgbClr val="828282"/>
+                </a:solidFill>
+                <a:latin typeface="Arial"/>
+              </a:rPr>
+              <a:t>この目には見えなくとも</a:t>
             </a:r>
           </a:p>
         </p:txBody>
@@ -4854,29 +5258,29 @@
         </p:nvSpPr>
         <p:spPr>
           <a:xfrm>
-            <a:off x="594360" y="4251960"/>
-            <a:ext cx="11002975" cy="347472"/>
-          </a:xfrm>
-          <a:prstGeom prst="rect">
-            <a:avLst/>
-          </a:prstGeom>
-          <a:noFill/>
-        </p:spPr>
-        <p:txBody>
-          <a:bodyPr wrap="square">
-            <a:spAutoFit/>
-          </a:bodyPr>
-          <a:lstStyle/>
-          <a:p>
-            <a:pPr algn="ctr"/>
-            <a:r>
-              <a:rPr sz="2200" b="0" i="1">
-                <a:solidFill>
-                  <a:srgbClr val="8C8C8C"/>
-                </a:solidFill>
-                <a:latin typeface="Arial"/>
-              </a:rPr>
-              <a:t/>
+            <a:off x="640080" y="4494276"/>
+            <a:ext cx="10911535" cy="310896"/>
+          </a:xfrm>
+          <a:prstGeom prst="rect">
+            <a:avLst/>
+          </a:prstGeom>
+          <a:noFill/>
+        </p:spPr>
+        <p:txBody>
+          <a:bodyPr wrap="square">
+            <a:spAutoFit/>
+          </a:bodyPr>
+          <a:lstStyle/>
+          <a:p>
+            <a:pPr algn="ctr"/>
+            <a:r>
+              <a:rPr sz="2000" b="0" i="0">
+                <a:solidFill>
+                  <a:srgbClr val="828282"/>
+                </a:solidFill>
+                <a:latin typeface="Arial"/>
+              </a:rPr>
+              <a:t>それを感じなくても</a:t>
             </a:r>
           </a:p>
         </p:txBody>
@@ -4915,29 +5319,29 @@
         </p:nvSpPr>
         <p:spPr>
           <a:xfrm>
-            <a:off x="594360" y="1837944"/>
-            <a:ext cx="11002975" cy="685800"/>
-          </a:xfrm>
-          <a:prstGeom prst="rect">
-            <a:avLst/>
-          </a:prstGeom>
-          <a:noFill/>
-        </p:spPr>
-        <p:txBody>
-          <a:bodyPr wrap="square">
-            <a:spAutoFit/>
-          </a:bodyPr>
-          <a:lstStyle/>
-          <a:p>
-            <a:pPr algn="ctr"/>
-            <a:r>
-              <a:rPr sz="4400" b="1" i="0">
+            <a:off x="640080" y="2052828"/>
+            <a:ext cx="10911535" cy="731520"/>
+          </a:xfrm>
+          <a:prstGeom prst="rect">
+            <a:avLst/>
+          </a:prstGeom>
+          <a:noFill/>
+        </p:spPr>
+        <p:txBody>
+          <a:bodyPr wrap="square">
+            <a:spAutoFit/>
+          </a:bodyPr>
+          <a:lstStyle/>
+          <a:p>
+            <a:pPr algn="ctr"/>
+            <a:r>
+              <a:rPr sz="4800" b="1" i="0">
                 <a:solidFill>
                   <a:srgbClr val="FFFFFF"/>
                 </a:solidFill>
                 <a:latin typeface="Arial"/>
               </a:rPr>
-              <a:t>この目には見えなくとも</a:t>
+              <a:t>Caminho no Deserto</a:t>
             </a:r>
           </a:p>
         </p:txBody>
@@ -4950,29 +5354,29 @@
         </p:nvSpPr>
         <p:spPr>
           <a:xfrm>
-            <a:off x="594360" y="2560320"/>
-            <a:ext cx="11002975" cy="384048"/>
-          </a:xfrm>
-          <a:prstGeom prst="rect">
-            <a:avLst/>
-          </a:prstGeom>
-          <a:noFill/>
-        </p:spPr>
-        <p:txBody>
-          <a:bodyPr wrap="square">
-            <a:spAutoFit/>
-          </a:bodyPr>
-          <a:lstStyle/>
-          <a:p>
-            <a:pPr algn="ctr"/>
-            <a:r>
-              <a:rPr sz="2400" b="0" i="1">
-                <a:solidFill>
-                  <a:srgbClr val="B4B4B4"/>
-                </a:solidFill>
-                <a:latin typeface="Arial"/>
-              </a:rPr>
-              <a:t>Kono Meniha Mienakutomo</a:t>
+            <a:off x="640080" y="2985516"/>
+            <a:ext cx="10911535" cy="731520"/>
+          </a:xfrm>
+          <a:prstGeom prst="rect">
+            <a:avLst/>
+          </a:prstGeom>
+          <a:noFill/>
+        </p:spPr>
+        <p:txBody>
+          <a:bodyPr wrap="square">
+            <a:spAutoFit/>
+          </a:bodyPr>
+          <a:lstStyle/>
+          <a:p>
+            <a:pPr algn="ctr"/>
+            <a:r>
+              <a:rPr sz="4800" b="1" i="0">
+                <a:solidFill>
+                  <a:srgbClr val="FFFFFF"/>
+                </a:solidFill>
+                <a:latin typeface="Arial"/>
+              </a:rPr>
+              <a:t>Deus de Milagres</a:t>
             </a:r>
           </a:p>
         </p:txBody>
@@ -4985,29 +5389,29 @@
         </p:nvSpPr>
         <p:spPr>
           <a:xfrm>
-            <a:off x="594360" y="2980944"/>
-            <a:ext cx="11002975" cy="347472"/>
-          </a:xfrm>
-          <a:prstGeom prst="rect">
-            <a:avLst/>
-          </a:prstGeom>
-          <a:noFill/>
-        </p:spPr>
-        <p:txBody>
-          <a:bodyPr wrap="square">
-            <a:spAutoFit/>
-          </a:bodyPr>
-          <a:lstStyle/>
-          <a:p>
-            <a:pPr algn="ctr"/>
-            <a:r>
-              <a:rPr sz="2000" b="0" i="1">
-                <a:solidFill>
-                  <a:srgbClr val="8C8C8C"/>
-                </a:solidFill>
-                <a:latin typeface="Arial"/>
-              </a:rPr>
-              <a:t/>
+            <a:off x="640080" y="4128516"/>
+            <a:ext cx="10911535" cy="310896"/>
+          </a:xfrm>
+          <a:prstGeom prst="rect">
+            <a:avLst/>
+          </a:prstGeom>
+          <a:noFill/>
+        </p:spPr>
+        <p:txBody>
+          <a:bodyPr wrap="square">
+            <a:spAutoFit/>
+          </a:bodyPr>
+          <a:lstStyle/>
+          <a:p>
+            <a:pPr algn="ctr"/>
+            <a:r>
+              <a:rPr sz="2000" b="0" i="0">
+                <a:solidFill>
+                  <a:srgbClr val="828282"/>
+                </a:solidFill>
+                <a:latin typeface="Arial"/>
+              </a:rPr>
+              <a:t>ここにあなたがいる</a:t>
             </a:r>
           </a:p>
         </p:txBody>
@@ -5020,99 +5424,29 @@
         </p:nvSpPr>
         <p:spPr>
           <a:xfrm>
-            <a:off x="594360" y="3529584"/>
-            <a:ext cx="11002975" cy="685800"/>
-          </a:xfrm>
-          <a:prstGeom prst="rect">
-            <a:avLst/>
-          </a:prstGeom>
-          <a:noFill/>
-        </p:spPr>
-        <p:txBody>
-          <a:bodyPr wrap="square">
-            <a:spAutoFit/>
-          </a:bodyPr>
-          <a:lstStyle/>
-          <a:p>
-            <a:pPr algn="ctr"/>
-            <a:r>
-              <a:rPr sz="4400" b="1" i="0">
-                <a:solidFill>
-                  <a:srgbClr val="FFFFFF"/>
-                </a:solidFill>
-                <a:latin typeface="Arial"/>
-              </a:rPr>
-              <a:t>それを感じなくても</a:t>
-            </a:r>
-          </a:p>
-        </p:txBody>
-      </p:sp>
-      <p:sp>
-        <p:nvSpPr>
-          <p:cNvPr id="6" name="TextBox 5"/>
-          <p:cNvSpPr txBox="1"/>
-          <p:nvPr/>
-        </p:nvSpPr>
-        <p:spPr>
-          <a:xfrm>
-            <a:off x="594360" y="4251960"/>
-            <a:ext cx="11002975" cy="384048"/>
-          </a:xfrm>
-          <a:prstGeom prst="rect">
-            <a:avLst/>
-          </a:prstGeom>
-          <a:noFill/>
-        </p:spPr>
-        <p:txBody>
-          <a:bodyPr wrap="square">
-            <a:spAutoFit/>
-          </a:bodyPr>
-          <a:lstStyle/>
-          <a:p>
-            <a:pPr algn="ctr"/>
-            <a:r>
-              <a:rPr sz="2400" b="0" i="1">
-                <a:solidFill>
-                  <a:srgbClr val="B4B4B4"/>
-                </a:solidFill>
-                <a:latin typeface="Arial"/>
-              </a:rPr>
-              <a:t>Sorewo Kanjinakutemo</a:t>
-            </a:r>
-          </a:p>
-        </p:txBody>
-      </p:sp>
-      <p:sp>
-        <p:nvSpPr>
-          <p:cNvPr id="7" name="TextBox 6"/>
-          <p:cNvSpPr txBox="1"/>
-          <p:nvPr/>
-        </p:nvSpPr>
-        <p:spPr>
-          <a:xfrm>
-            <a:off x="594360" y="4672584"/>
-            <a:ext cx="11002975" cy="347472"/>
-          </a:xfrm>
-          <a:prstGeom prst="rect">
-            <a:avLst/>
-          </a:prstGeom>
-          <a:noFill/>
-        </p:spPr>
-        <p:txBody>
-          <a:bodyPr wrap="square">
-            <a:spAutoFit/>
-          </a:bodyPr>
-          <a:lstStyle/>
-          <a:p>
-            <a:pPr algn="ctr"/>
-            <a:r>
-              <a:rPr sz="2000" b="0" i="1">
-                <a:solidFill>
-                  <a:srgbClr val="8C8C8C"/>
-                </a:solidFill>
-                <a:latin typeface="Arial"/>
-              </a:rPr>
-              <a:t/>
+            <a:off x="640080" y="4494276"/>
+            <a:ext cx="10911535" cy="310896"/>
+          </a:xfrm>
+          <a:prstGeom prst="rect">
+            <a:avLst/>
+          </a:prstGeom>
+          <a:noFill/>
+        </p:spPr>
+        <p:txBody>
+          <a:bodyPr wrap="square">
+            <a:spAutoFit/>
+          </a:bodyPr>
+          <a:lstStyle/>
+          <a:p>
+            <a:pPr algn="ctr"/>
+            <a:r>
+              <a:rPr sz="2000" b="0" i="0">
+                <a:solidFill>
+                  <a:srgbClr val="828282"/>
+                </a:solidFill>
+                <a:latin typeface="Arial"/>
+              </a:rPr>
+              <a:t>ここで働いている (x2)</a:t>
             </a:r>
           </a:p>
         </p:txBody>
@@ -5151,29 +5485,29 @@
         </p:nvSpPr>
         <p:spPr>
           <a:xfrm>
-            <a:off x="594360" y="1837944"/>
-            <a:ext cx="11002975" cy="685800"/>
-          </a:xfrm>
-          <a:prstGeom prst="rect">
-            <a:avLst/>
-          </a:prstGeom>
-          <a:noFill/>
-        </p:spPr>
-        <p:txBody>
-          <a:bodyPr wrap="square">
-            <a:spAutoFit/>
-          </a:bodyPr>
-          <a:lstStyle/>
-          <a:p>
-            <a:pPr algn="ctr"/>
-            <a:r>
-              <a:rPr sz="4400" b="1" i="0">
+            <a:off x="640080" y="1650492"/>
+            <a:ext cx="10911535" cy="731520"/>
+          </a:xfrm>
+          <a:prstGeom prst="rect">
+            <a:avLst/>
+          </a:prstGeom>
+          <a:noFill/>
+        </p:spPr>
+        <p:txBody>
+          <a:bodyPr wrap="square">
+            <a:spAutoFit/>
+          </a:bodyPr>
+          <a:lstStyle/>
+          <a:p>
+            <a:pPr algn="ctr"/>
+            <a:r>
+              <a:rPr sz="4800" b="1" i="0">
                 <a:solidFill>
                   <a:srgbClr val="FFFFFF"/>
                 </a:solidFill>
                 <a:latin typeface="Arial"/>
               </a:rPr>
-              <a:t>ここにあなたがいる</a:t>
+              <a:t>この目には見えなくとも</a:t>
             </a:r>
           </a:p>
         </p:txBody>
@@ -5186,8 +5520,8 @@
         </p:nvSpPr>
         <p:spPr>
           <a:xfrm>
-            <a:off x="594360" y="2560320"/>
-            <a:ext cx="11002975" cy="384048"/>
+            <a:off x="640080" y="2418588"/>
+            <a:ext cx="10911535" cy="365760"/>
           </a:xfrm>
           <a:prstGeom prst="rect">
             <a:avLst/>
@@ -5204,11 +5538,11 @@
             <a:r>
               <a:rPr sz="2400" b="0" i="1">
                 <a:solidFill>
-                  <a:srgbClr val="B4B4B4"/>
-                </a:solidFill>
-                <a:latin typeface="Arial"/>
-              </a:rPr>
-              <a:t>Kokoni Anataga iru</a:t>
+                  <a:srgbClr val="AAAAAA"/>
+                </a:solidFill>
+                <a:latin typeface="Arial"/>
+              </a:rPr>
+              <a:t>Kono Meniha Mienakutomo</a:t>
             </a:r>
           </a:p>
         </p:txBody>
@@ -5221,8 +5555,78 @@
         </p:nvSpPr>
         <p:spPr>
           <a:xfrm>
-            <a:off x="594360" y="2980944"/>
-            <a:ext cx="11002975" cy="347472"/>
+            <a:off x="640080" y="2985516"/>
+            <a:ext cx="10911535" cy="731520"/>
+          </a:xfrm>
+          <a:prstGeom prst="rect">
+            <a:avLst/>
+          </a:prstGeom>
+          <a:noFill/>
+        </p:spPr>
+        <p:txBody>
+          <a:bodyPr wrap="square">
+            <a:spAutoFit/>
+          </a:bodyPr>
+          <a:lstStyle/>
+          <a:p>
+            <a:pPr algn="ctr"/>
+            <a:r>
+              <a:rPr sz="4800" b="1" i="0">
+                <a:solidFill>
+                  <a:srgbClr val="FFFFFF"/>
+                </a:solidFill>
+                <a:latin typeface="Arial"/>
+              </a:rPr>
+              <a:t>それを感じなくても</a:t>
+            </a:r>
+          </a:p>
+        </p:txBody>
+      </p:sp>
+      <p:sp>
+        <p:nvSpPr>
+          <p:cNvPr id="5" name="TextBox 4"/>
+          <p:cNvSpPr txBox="1"/>
+          <p:nvPr/>
+        </p:nvSpPr>
+        <p:spPr>
+          <a:xfrm>
+            <a:off x="640080" y="3753612"/>
+            <a:ext cx="10911535" cy="365760"/>
+          </a:xfrm>
+          <a:prstGeom prst="rect">
+            <a:avLst/>
+          </a:prstGeom>
+          <a:noFill/>
+        </p:spPr>
+        <p:txBody>
+          <a:bodyPr wrap="square">
+            <a:spAutoFit/>
+          </a:bodyPr>
+          <a:lstStyle/>
+          <a:p>
+            <a:pPr algn="ctr"/>
+            <a:r>
+              <a:rPr sz="2400" b="0" i="1">
+                <a:solidFill>
+                  <a:srgbClr val="AAAAAA"/>
+                </a:solidFill>
+                <a:latin typeface="Arial"/>
+              </a:rPr>
+              <a:t>Sorewo Kanjinakutemo</a:t>
+            </a:r>
+          </a:p>
+        </p:txBody>
+      </p:sp>
+      <p:sp>
+        <p:nvSpPr>
+          <p:cNvPr id="6" name="TextBox 5"/>
+          <p:cNvSpPr txBox="1"/>
+          <p:nvPr/>
+        </p:nvSpPr>
+        <p:spPr>
+          <a:xfrm>
+            <a:off x="640080" y="4530852"/>
+            <a:ext cx="10911535" cy="310896"/>
           </a:xfrm>
           <a:prstGeom prst="rect">
             <a:avLst/>
@@ -5239,81 +5643,11 @@
             <a:r>
               <a:rPr sz="2000" b="0" i="1">
                 <a:solidFill>
-                  <a:srgbClr val="8C8C8C"/>
-                </a:solidFill>
-                <a:latin typeface="Arial"/>
-              </a:rPr>
-              <a:t/>
-            </a:r>
-          </a:p>
-        </p:txBody>
-      </p:sp>
-      <p:sp>
-        <p:nvSpPr>
-          <p:cNvPr id="5" name="TextBox 4"/>
-          <p:cNvSpPr txBox="1"/>
-          <p:nvPr/>
-        </p:nvSpPr>
-        <p:spPr>
-          <a:xfrm>
-            <a:off x="594360" y="3529584"/>
-            <a:ext cx="11002975" cy="685800"/>
-          </a:xfrm>
-          <a:prstGeom prst="rect">
-            <a:avLst/>
-          </a:prstGeom>
-          <a:noFill/>
-        </p:spPr>
-        <p:txBody>
-          <a:bodyPr wrap="square">
-            <a:spAutoFit/>
-          </a:bodyPr>
-          <a:lstStyle/>
-          <a:p>
-            <a:pPr algn="ctr"/>
-            <a:r>
-              <a:rPr sz="4400" b="1" i="0">
-                <a:solidFill>
-                  <a:srgbClr val="FFFFFF"/>
-                </a:solidFill>
-                <a:latin typeface="Arial"/>
-              </a:rPr>
-              <a:t>ここで働いている (x2)</a:t>
-            </a:r>
-          </a:p>
-        </p:txBody>
-      </p:sp>
-      <p:sp>
-        <p:nvSpPr>
-          <p:cNvPr id="6" name="TextBox 5"/>
-          <p:cNvSpPr txBox="1"/>
-          <p:nvPr/>
-        </p:nvSpPr>
-        <p:spPr>
-          <a:xfrm>
-            <a:off x="594360" y="4251960"/>
-            <a:ext cx="11002975" cy="384048"/>
-          </a:xfrm>
-          <a:prstGeom prst="rect">
-            <a:avLst/>
-          </a:prstGeom>
-          <a:noFill/>
-        </p:spPr>
-        <p:txBody>
-          <a:bodyPr wrap="square">
-            <a:spAutoFit/>
-          </a:bodyPr>
-          <a:lstStyle/>
-          <a:p>
-            <a:pPr algn="ctr"/>
-            <a:r>
-              <a:rPr sz="2400" b="0" i="1">
-                <a:solidFill>
-                  <a:srgbClr val="B4B4B4"/>
-                </a:solidFill>
-                <a:latin typeface="Arial"/>
-              </a:rPr>
-              <a:t>Kokode Hataraiteiru</a:t>
+                  <a:srgbClr val="828282"/>
+                </a:solidFill>
+                <a:latin typeface="Arial"/>
+              </a:rPr>
+              <a:t>Tu estás aqui</a:t>
             </a:r>
           </a:p>
         </p:txBody>
@@ -5326,8 +5660,8 @@
         </p:nvSpPr>
         <p:spPr>
           <a:xfrm>
-            <a:off x="594360" y="4672584"/>
-            <a:ext cx="11002975" cy="347472"/>
+            <a:off x="640080" y="4896612"/>
+            <a:ext cx="10911535" cy="310896"/>
           </a:xfrm>
           <a:prstGeom prst="rect">
             <a:avLst/>
@@ -5344,11 +5678,11 @@
             <a:r>
               <a:rPr sz="2000" b="0" i="1">
                 <a:solidFill>
-                  <a:srgbClr val="8C8C8C"/>
-                </a:solidFill>
-                <a:latin typeface="Arial"/>
-              </a:rPr>
-              <a:t/>
+                  <a:srgbClr val="828282"/>
+                </a:solidFill>
+                <a:latin typeface="Arial"/>
+              </a:rPr>
+              <a:t>Realizando milagres</a:t>
             </a:r>
           </a:p>
         </p:txBody>

--- a/output_pptx/Way_Maker.pptx
+++ b/output_pptx/Way_Maker.pptx
@@ -4219,6 +4219,76 @@
           </a:p>
         </p:txBody>
       </p:sp>
+      <p:sp>
+        <p:nvSpPr>
+          <p:cNvPr id="4" name="TextBox 3"/>
+          <p:cNvSpPr txBox="1"/>
+          <p:nvPr/>
+        </p:nvSpPr>
+        <p:spPr>
+          <a:xfrm>
+            <a:off x="640080" y="4128516"/>
+            <a:ext cx="10911535" cy="310896"/>
+          </a:xfrm>
+          <a:prstGeom prst="rect">
+            <a:avLst/>
+          </a:prstGeom>
+          <a:noFill/>
+        </p:spPr>
+        <p:txBody>
+          <a:bodyPr wrap="square">
+            <a:spAutoFit/>
+          </a:bodyPr>
+          <a:lstStyle/>
+          <a:p>
+            <a:pPr algn="ctr"/>
+            <a:r>
+              <a:rPr sz="2000" b="0" i="0">
+                <a:solidFill>
+                  <a:srgbClr val="828282"/>
+                </a:solidFill>
+                <a:latin typeface="Arial"/>
+              </a:rPr>
+              <a:t>暗闇の中の光</a:t>
+            </a:r>
+          </a:p>
+        </p:txBody>
+      </p:sp>
+      <p:sp>
+        <p:nvSpPr>
+          <p:cNvPr id="5" name="TextBox 4"/>
+          <p:cNvSpPr txBox="1"/>
+          <p:nvPr/>
+        </p:nvSpPr>
+        <p:spPr>
+          <a:xfrm>
+            <a:off x="640080" y="4494276"/>
+            <a:ext cx="10911535" cy="310896"/>
+          </a:xfrm>
+          <a:prstGeom prst="rect">
+            <a:avLst/>
+          </a:prstGeom>
+          <a:noFill/>
+        </p:spPr>
+        <p:txBody>
+          <a:bodyPr wrap="square">
+            <a:spAutoFit/>
+          </a:bodyPr>
+          <a:lstStyle/>
+          <a:p>
+            <a:pPr algn="ctr"/>
+            <a:r>
+              <a:rPr sz="2000" b="0" i="0">
+                <a:solidFill>
+                  <a:srgbClr val="828282"/>
+                </a:solidFill>
+                <a:latin typeface="Arial"/>
+              </a:rPr>
+              <a:t>私の神</a:t>
+            </a:r>
+          </a:p>
+        </p:txBody>
+      </p:sp>
     </p:spTree>
   </p:cSld>
   <p:clrMapOvr>
@@ -4643,6 +4713,76 @@
                 <a:latin typeface="Arial"/>
               </a:rPr>
               <a:t>Meu Deus</a:t>
+            </a:r>
+          </a:p>
+        </p:txBody>
+      </p:sp>
+      <p:sp>
+        <p:nvSpPr>
+          <p:cNvPr id="4" name="TextBox 3"/>
+          <p:cNvSpPr txBox="1"/>
+          <p:nvPr/>
+        </p:nvSpPr>
+        <p:spPr>
+          <a:xfrm>
+            <a:off x="640080" y="4128516"/>
+            <a:ext cx="10911535" cy="310896"/>
+          </a:xfrm>
+          <a:prstGeom prst="rect">
+            <a:avLst/>
+          </a:prstGeom>
+          <a:noFill/>
+        </p:spPr>
+        <p:txBody>
+          <a:bodyPr wrap="square">
+            <a:spAutoFit/>
+          </a:bodyPr>
+          <a:lstStyle/>
+          <a:p>
+            <a:pPr algn="ctr"/>
+            <a:r>
+              <a:rPr sz="2000" b="0" i="0">
+                <a:solidFill>
+                  <a:srgbClr val="828282"/>
+                </a:solidFill>
+                <a:latin typeface="Arial"/>
+              </a:rPr>
+              <a:t>暗闇の中の光</a:t>
+            </a:r>
+          </a:p>
+        </p:txBody>
+      </p:sp>
+      <p:sp>
+        <p:nvSpPr>
+          <p:cNvPr id="5" name="TextBox 4"/>
+          <p:cNvSpPr txBox="1"/>
+          <p:nvPr/>
+        </p:nvSpPr>
+        <p:spPr>
+          <a:xfrm>
+            <a:off x="640080" y="4494276"/>
+            <a:ext cx="10911535" cy="310896"/>
+          </a:xfrm>
+          <a:prstGeom prst="rect">
+            <a:avLst/>
+          </a:prstGeom>
+          <a:noFill/>
+        </p:spPr>
+        <p:txBody>
+          <a:bodyPr wrap="square">
+            <a:spAutoFit/>
+          </a:bodyPr>
+          <a:lstStyle/>
+          <a:p>
+            <a:pPr algn="ctr"/>
+            <a:r>
+              <a:rPr sz="2000" b="0" i="0">
+                <a:solidFill>
+                  <a:srgbClr val="828282"/>
+                </a:solidFill>
+                <a:latin typeface="Arial"/>
+              </a:rPr>
+              <a:t>私の神</a:t>
             </a:r>
           </a:p>
         </p:txBody>
